--- a/vercel/public/admin-files/0818 日本語版完成.pptx
+++ b/vercel/public/admin-files/0818 日本語版完成.pptx
@@ -5,7 +5,7 @@
     <p:sldMasterId id="2147483648" r:id="rId1"/>
   </p:sldMasterIdLst>
   <p:notesMasterIdLst>
-    <p:notesMasterId r:id="rId27"/>
+    <p:notesMasterId r:id="rId26"/>
   </p:notesMasterIdLst>
   <p:sldIdLst>
     <p:sldId id="256" r:id="rId2"/>
@@ -21,18 +21,17 @@
     <p:sldId id="265" r:id="rId12"/>
     <p:sldId id="276" r:id="rId13"/>
     <p:sldId id="266" r:id="rId14"/>
-    <p:sldId id="267" r:id="rId15"/>
-    <p:sldId id="275" r:id="rId16"/>
-    <p:sldId id="277" r:id="rId17"/>
-    <p:sldId id="279" r:id="rId18"/>
+    <p:sldId id="275" r:id="rId15"/>
+    <p:sldId id="277" r:id="rId16"/>
+    <p:sldId id="279" r:id="rId17"/>
+    <p:sldId id="288" r:id="rId18"/>
     <p:sldId id="269" r:id="rId19"/>
     <p:sldId id="281" r:id="rId20"/>
     <p:sldId id="280" r:id="rId21"/>
     <p:sldId id="270" r:id="rId22"/>
     <p:sldId id="283" r:id="rId23"/>
     <p:sldId id="271" r:id="rId24"/>
-    <p:sldId id="272" r:id="rId25"/>
-    <p:sldId id="273" r:id="rId26"/>
+    <p:sldId id="273" r:id="rId25"/>
   </p:sldIdLst>
   <p:sldSz cx="9144000" cy="5143500" type="screen16x9"/>
   <p:notesSz cx="6858000" cy="9144000"/>
@@ -1148,81 +1147,6 @@
   <p:cSld>
     <p:spTree>
       <p:nvGrpSpPr>
-        <p:cNvPr id="1" name=""/>
-        <p:cNvGrpSpPr/>
-        <p:nvPr/>
-      </p:nvGrpSpPr>
-      <p:grpSpPr>
-        <a:xfrm>
-          <a:off x="0" y="0"/>
-          <a:ext cx="0" cy="0"/>
-          <a:chOff x="0" y="0"/>
-          <a:chExt cx="0" cy="0"/>
-        </a:xfrm>
-      </p:grpSpPr>
-      <p:sp>
-        <p:nvSpPr>
-          <p:cNvPr id="2" name="Slide Image Placeholder 1"/>
-          <p:cNvSpPr>
-            <a:spLocks noGrp="1" noRot="1" noChangeAspect="1"/>
-          </p:cNvSpPr>
-          <p:nvPr>
-            <p:ph type="sldImg"/>
-          </p:nvPr>
-        </p:nvSpPr>
-        <p:spPr/>
-      </p:sp>
-      <p:sp>
-        <p:nvSpPr>
-          <p:cNvPr id="3" name="Notes Placeholder 2"/>
-          <p:cNvSpPr>
-            <a:spLocks noGrp="1"/>
-          </p:cNvSpPr>
-          <p:nvPr>
-            <p:ph type="body" idx="1"/>
-          </p:nvPr>
-        </p:nvSpPr>
-        <p:spPr/>
-        <p:txBody>
-          <a:bodyPr/>
-          <a:lstStyle/>
-          <a:p>
-            <a:endParaRPr/>
-          </a:p>
-        </p:txBody>
-      </p:sp>
-      <p:sp>
-        <p:nvSpPr>
-          <p:cNvPr id="4" name="Slide Number Placeholder 3"/>
-          <p:cNvSpPr>
-            <a:spLocks noGrp="1"/>
-          </p:cNvSpPr>
-          <p:nvPr>
-            <p:ph type="sldNum" idx="5"/>
-          </p:nvPr>
-        </p:nvSpPr>
-        <p:spPr/>
-        <p:txBody>
-          <a:bodyPr/>
-          <a:lstStyle/>
-          <a:p>
-            <a:endParaRPr/>
-          </a:p>
-        </p:txBody>
-      </p:sp>
-    </p:spTree>
-  </p:cSld>
-  <p:clrMapOvr>
-    <a:masterClrMapping/>
-  </p:clrMapOvr>
-</p:notes>
-</file>
-
-<file path=ppt/notesSlides/notesSlide16.xml><?xml version="1.0" encoding="utf-8"?>
-<p:notes xmlns:a="http://schemas.openxmlformats.org/drawingml/2006/main" xmlns:r="http://schemas.openxmlformats.org/officeDocument/2006/relationships" xmlns:p="http://schemas.openxmlformats.org/presentationml/2006/main">
-  <p:cSld>
-    <p:spTree>
-      <p:nvGrpSpPr>
         <p:cNvPr id="1" name="">
           <a:extLst>
             <a:ext uri="{FF2B5EF4-FFF2-40B4-BE49-F238E27FC236}">
@@ -1322,7 +1246,7 @@
 </p:notes>
 </file>
 
-<file path=ppt/notesSlides/notesSlide17.xml><?xml version="1.0" encoding="utf-8"?>
+<file path=ppt/notesSlides/notesSlide16.xml><?xml version="1.0" encoding="utf-8"?>
 <p:notes xmlns:a="http://schemas.openxmlformats.org/drawingml/2006/main" xmlns:r="http://schemas.openxmlformats.org/officeDocument/2006/relationships" xmlns:p="http://schemas.openxmlformats.org/presentationml/2006/main">
   <p:cSld>
     <p:spTree>
@@ -1417,6 +1341,110 @@
     <p:extLst>
       <p:ext uri="{BB962C8B-B14F-4D97-AF65-F5344CB8AC3E}">
         <p14:creationId xmlns:p14="http://schemas.microsoft.com/office/powerpoint/2010/main" val="1744900518"/>
+      </p:ext>
+    </p:extLst>
+  </p:cSld>
+  <p:clrMapOvr>
+    <a:masterClrMapping/>
+  </p:clrMapOvr>
+</p:notes>
+</file>
+
+<file path=ppt/notesSlides/notesSlide17.xml><?xml version="1.0" encoding="utf-8"?>
+<p:notes xmlns:a="http://schemas.openxmlformats.org/drawingml/2006/main" xmlns:r="http://schemas.openxmlformats.org/officeDocument/2006/relationships" xmlns:p="http://schemas.openxmlformats.org/presentationml/2006/main">
+  <p:cSld>
+    <p:spTree>
+      <p:nvGrpSpPr>
+        <p:cNvPr id="1" name="">
+          <a:extLst>
+            <a:ext uri="{FF2B5EF4-FFF2-40B4-BE49-F238E27FC236}">
+              <a16:creationId xmlns:a16="http://schemas.microsoft.com/office/drawing/2014/main" id="{2FF77016-076A-BEEE-D9C5-7A745B327DDC}"/>
+            </a:ext>
+          </a:extLst>
+        </p:cNvPr>
+        <p:cNvGrpSpPr/>
+        <p:nvPr/>
+      </p:nvGrpSpPr>
+      <p:grpSpPr>
+        <a:xfrm>
+          <a:off x="0" y="0"/>
+          <a:ext cx="0" cy="0"/>
+          <a:chOff x="0" y="0"/>
+          <a:chExt cx="0" cy="0"/>
+        </a:xfrm>
+      </p:grpSpPr>
+      <p:sp>
+        <p:nvSpPr>
+          <p:cNvPr id="2" name="Slide Image Placeholder 1">
+            <a:extLst>
+              <a:ext uri="{FF2B5EF4-FFF2-40B4-BE49-F238E27FC236}">
+                <a16:creationId xmlns:a16="http://schemas.microsoft.com/office/drawing/2014/main" id="{B21B12DE-CB63-1D12-BB88-F637CF24CE42}"/>
+              </a:ext>
+            </a:extLst>
+          </p:cNvPr>
+          <p:cNvSpPr>
+            <a:spLocks noGrp="1" noRot="1" noChangeAspect="1"/>
+          </p:cNvSpPr>
+          <p:nvPr>
+            <p:ph type="sldImg"/>
+          </p:nvPr>
+        </p:nvSpPr>
+        <p:spPr/>
+      </p:sp>
+      <p:sp>
+        <p:nvSpPr>
+          <p:cNvPr id="3" name="Notes Placeholder 2">
+            <a:extLst>
+              <a:ext uri="{FF2B5EF4-FFF2-40B4-BE49-F238E27FC236}">
+                <a16:creationId xmlns:a16="http://schemas.microsoft.com/office/drawing/2014/main" id="{A42C9B60-4CA2-CD8B-3350-43DEDFDE82E8}"/>
+              </a:ext>
+            </a:extLst>
+          </p:cNvPr>
+          <p:cNvSpPr>
+            <a:spLocks noGrp="1"/>
+          </p:cNvSpPr>
+          <p:nvPr>
+            <p:ph type="body" idx="1"/>
+          </p:nvPr>
+        </p:nvSpPr>
+        <p:spPr/>
+        <p:txBody>
+          <a:bodyPr/>
+          <a:lstStyle/>
+          <a:p>
+            <a:endParaRPr/>
+          </a:p>
+        </p:txBody>
+      </p:sp>
+      <p:sp>
+        <p:nvSpPr>
+          <p:cNvPr id="4" name="Slide Number Placeholder 3">
+            <a:extLst>
+              <a:ext uri="{FF2B5EF4-FFF2-40B4-BE49-F238E27FC236}">
+                <a16:creationId xmlns:a16="http://schemas.microsoft.com/office/drawing/2014/main" id="{B0370016-70C8-6603-888A-154DFD05C384}"/>
+              </a:ext>
+            </a:extLst>
+          </p:cNvPr>
+          <p:cNvSpPr>
+            <a:spLocks noGrp="1"/>
+          </p:cNvSpPr>
+          <p:nvPr>
+            <p:ph type="sldNum" idx="5"/>
+          </p:nvPr>
+        </p:nvSpPr>
+        <p:spPr/>
+        <p:txBody>
+          <a:bodyPr/>
+          <a:lstStyle/>
+          <a:p>
+            <a:endParaRPr/>
+          </a:p>
+        </p:txBody>
+      </p:sp>
+    </p:spTree>
+    <p:extLst>
+      <p:ext uri="{BB962C8B-B14F-4D97-AF65-F5344CB8AC3E}">
+        <p14:creationId xmlns:p14="http://schemas.microsoft.com/office/powerpoint/2010/main" val="2372167251"/>
       </p:ext>
     </p:extLst>
   </p:cSld>
@@ -2039,81 +2067,6 @@
 </file>
 
 <file path=ppt/notesSlides/notesSlide24.xml><?xml version="1.0" encoding="utf-8"?>
-<p:notes xmlns:a="http://schemas.openxmlformats.org/drawingml/2006/main" xmlns:r="http://schemas.openxmlformats.org/officeDocument/2006/relationships" xmlns:p="http://schemas.openxmlformats.org/presentationml/2006/main">
-  <p:cSld>
-    <p:spTree>
-      <p:nvGrpSpPr>
-        <p:cNvPr id="1" name=""/>
-        <p:cNvGrpSpPr/>
-        <p:nvPr/>
-      </p:nvGrpSpPr>
-      <p:grpSpPr>
-        <a:xfrm>
-          <a:off x="0" y="0"/>
-          <a:ext cx="0" cy="0"/>
-          <a:chOff x="0" y="0"/>
-          <a:chExt cx="0" cy="0"/>
-        </a:xfrm>
-      </p:grpSpPr>
-      <p:sp>
-        <p:nvSpPr>
-          <p:cNvPr id="2" name="Slide Image Placeholder 1"/>
-          <p:cNvSpPr>
-            <a:spLocks noGrp="1" noRot="1" noChangeAspect="1"/>
-          </p:cNvSpPr>
-          <p:nvPr>
-            <p:ph type="sldImg"/>
-          </p:nvPr>
-        </p:nvSpPr>
-        <p:spPr/>
-      </p:sp>
-      <p:sp>
-        <p:nvSpPr>
-          <p:cNvPr id="3" name="Notes Placeholder 2"/>
-          <p:cNvSpPr>
-            <a:spLocks noGrp="1"/>
-          </p:cNvSpPr>
-          <p:nvPr>
-            <p:ph type="body" idx="1"/>
-          </p:nvPr>
-        </p:nvSpPr>
-        <p:spPr/>
-        <p:txBody>
-          <a:bodyPr/>
-          <a:lstStyle/>
-          <a:p>
-            <a:endParaRPr/>
-          </a:p>
-        </p:txBody>
-      </p:sp>
-      <p:sp>
-        <p:nvSpPr>
-          <p:cNvPr id="4" name="Slide Number Placeholder 3"/>
-          <p:cNvSpPr>
-            <a:spLocks noGrp="1"/>
-          </p:cNvSpPr>
-          <p:nvPr>
-            <p:ph type="sldNum" idx="5"/>
-          </p:nvPr>
-        </p:nvSpPr>
-        <p:spPr/>
-        <p:txBody>
-          <a:bodyPr/>
-          <a:lstStyle/>
-          <a:p>
-            <a:endParaRPr/>
-          </a:p>
-        </p:txBody>
-      </p:sp>
-    </p:spTree>
-  </p:cSld>
-  <p:clrMapOvr>
-    <a:masterClrMapping/>
-  </p:clrMapOvr>
-</p:notes>
-</file>
-
-<file path=ppt/notesSlides/notesSlide25.xml><?xml version="1.0" encoding="utf-8"?>
 <p:notes xmlns:a="http://schemas.openxmlformats.org/drawingml/2006/main" xmlns:r="http://schemas.openxmlformats.org/officeDocument/2006/relationships" xmlns:p="http://schemas.openxmlformats.org/presentationml/2006/main">
   <p:cSld>
     <p:spTree>
@@ -13152,975 +13105,6 @@
           <a:p>
             <a:pPr algn="l">
               <a:buNone/>
-              <a:defRPr sz="2138" b="1">
-                <a:solidFill>
-                  <a:srgbClr val="111827"/>
-                </a:solidFill>
-                <a:latin typeface="Noto Sans CJK JP"/>
-                <a:ea typeface="Noto Sans CJK JP"/>
-                <a:cs typeface="Noto Sans CJK JP"/>
-              </a:defRPr>
-            </a:pPr>
-            <a:r>
-              <a:rPr sz="2138" b="1" dirty="0" err="1">
-                <a:solidFill>
-                  <a:srgbClr val="111827"/>
-                </a:solidFill>
-                <a:latin typeface="Noto Sans CJK JP"/>
-                <a:ea typeface="Noto Sans CJK JP"/>
-                <a:cs typeface="Noto Sans CJK JP"/>
-              </a:rPr>
-              <a:t>同じ年齢でも、残高</a:t>
-            </a:r>
-            <a:r>
-              <a:rPr lang="en-US" sz="2138" b="1" dirty="0" err="1">
-                <a:solidFill>
-                  <a:srgbClr val="111827"/>
-                </a:solidFill>
-                <a:latin typeface="Noto Sans CJK JP"/>
-                <a:ea typeface="Noto Sans CJK JP"/>
-                <a:cs typeface="Noto Sans CJK JP"/>
-              </a:rPr>
-              <a:t>X</a:t>
-            </a:r>
-            <a:r>
-              <a:rPr sz="2138" b="1" dirty="0" err="1">
-                <a:solidFill>
-                  <a:srgbClr val="111827"/>
-                </a:solidFill>
-                <a:latin typeface="Noto Sans CJK JP"/>
-                <a:ea typeface="Noto Sans CJK JP"/>
-                <a:cs typeface="Noto Sans CJK JP"/>
-              </a:rPr>
-              <a:t>と背景富</a:t>
-            </a:r>
-            <a:r>
-              <a:rPr lang="en-US" sz="2138" b="1" dirty="0" err="1">
-                <a:solidFill>
-                  <a:srgbClr val="111827"/>
-                </a:solidFill>
-                <a:latin typeface="Noto Sans CJK JP"/>
-                <a:ea typeface="Noto Sans CJK JP"/>
-                <a:cs typeface="Noto Sans CJK JP"/>
-              </a:rPr>
-              <a:t>H</a:t>
-            </a:r>
-            <a:r>
-              <a:rPr sz="2138" b="1" dirty="0" err="1">
-                <a:solidFill>
-                  <a:srgbClr val="111827"/>
-                </a:solidFill>
-                <a:latin typeface="Noto Sans CJK JP"/>
-                <a:ea typeface="Noto Sans CJK JP"/>
-                <a:cs typeface="Noto Sans CJK JP"/>
-              </a:rPr>
-              <a:t>が違えば最適比率は変わる</a:t>
-            </a:r>
-            <a:endParaRPr sz="2138" b="1" dirty="0">
-              <a:solidFill>
-                <a:srgbClr val="111827"/>
-              </a:solidFill>
-              <a:latin typeface="Noto Sans CJK JP"/>
-              <a:ea typeface="Noto Sans CJK JP"/>
-              <a:cs typeface="Noto Sans CJK JP"/>
-            </a:endParaRPr>
-          </a:p>
-        </p:txBody>
-      </p:sp>
-      <p:sp>
-        <p:nvSpPr>
-          <p:cNvPr id="3" name="title-divider">
-            <a:extLst>
-              <a:ext uri="{FF2B5EF4-FFF2-40B4-BE49-F238E27FC236}">
-                <a16:creationId xmlns:a16="http://schemas.microsoft.com/office/drawing/2014/main" id="{84DE86B1-1E7C-4DEC-BD69-272D04F0A11D}"/>
-              </a:ext>
-            </a:extLst>
-          </p:cNvPr>
-          <p:cNvSpPr>
-            <a:spLocks noGrp="1"/>
-          </p:cNvSpPr>
-          <p:nvPr/>
-        </p:nvSpPr>
-        <p:spPr>
-          <a:xfrm>
-            <a:off x="457200" y="1676400"/>
-            <a:ext cx="8229600" cy="9525"/>
-          </a:xfrm>
-          <a:prstGeom prst="rect">
-            <a:avLst/>
-          </a:prstGeom>
-          <a:solidFill>
-            <a:srgbClr val="E5EAF0"/>
-          </a:solidFill>
-          <a:ln w="0">
-            <a:noFill/>
-            <a:prstDash val="solid"/>
-          </a:ln>
-        </p:spPr>
-      </p:sp>
-      <p:sp>
-        <p:nvSpPr>
-          <p:cNvPr id="4" name="title-accent">
-            <a:extLst>
-              <a:ext uri="{FF2B5EF4-FFF2-40B4-BE49-F238E27FC236}">
-                <a16:creationId xmlns:a16="http://schemas.microsoft.com/office/drawing/2014/main" id="{2B511B79-01E3-4DDD-97C9-25706ACAA801}"/>
-              </a:ext>
-            </a:extLst>
-          </p:cNvPr>
-          <p:cNvSpPr>
-            <a:spLocks noGrp="1"/>
-          </p:cNvSpPr>
-          <p:nvPr/>
-        </p:nvSpPr>
-        <p:spPr>
-          <a:xfrm>
-            <a:off x="457200" y="1666875"/>
-            <a:ext cx="552450" cy="38100"/>
-          </a:xfrm>
-          <a:prstGeom prst="rect">
-            <a:avLst/>
-          </a:prstGeom>
-          <a:solidFill>
-            <a:srgbClr val="4A90E2"/>
-          </a:solidFill>
-          <a:ln w="0">
-            <a:noFill/>
-            <a:prstDash val="solid"/>
-          </a:ln>
-        </p:spPr>
-      </p:sp>
-      <p:sp>
-        <p:nvSpPr>
-          <p:cNvPr id="14" name="chapter-tab-1">
-            <a:extLst>
-              <a:ext uri="{FF2B5EF4-FFF2-40B4-BE49-F238E27FC236}">
-                <a16:creationId xmlns:a16="http://schemas.microsoft.com/office/drawing/2014/main" id="{BBBB533B-CCDE-4A49-A4BE-0BB71D648630}"/>
-              </a:ext>
-            </a:extLst>
-          </p:cNvPr>
-          <p:cNvSpPr>
-            <a:spLocks noGrp="1"/>
-          </p:cNvSpPr>
-          <p:nvPr/>
-        </p:nvSpPr>
-        <p:spPr>
-          <a:xfrm>
-            <a:off x="457200" y="4857750"/>
-            <a:ext cx="2057400" cy="238125"/>
-          </a:xfrm>
-          <a:prstGeom prst="parallelogram">
-            <a:avLst/>
-          </a:prstGeom>
-          <a:solidFill>
-            <a:srgbClr val="FFFFFF"/>
-          </a:solidFill>
-          <a:ln w="10001">
-            <a:solidFill>
-              <a:srgbClr val="4A90E2"/>
-            </a:solidFill>
-            <a:prstDash val="solid"/>
-          </a:ln>
-        </p:spPr>
-        <p:txBody>
-          <a:bodyPr wrap="none" lIns="76200" tIns="0" rIns="76200" bIns="0" anchor="ctr">
-            <a:normAutofit/>
-          </a:bodyPr>
-          <a:lstStyle/>
-          <a:p>
-            <a:pPr algn="ctr">
-              <a:buNone/>
-              <a:defRPr sz="998" b="1">
-                <a:solidFill>
-                  <a:srgbClr val="4A90E2"/>
-                </a:solidFill>
-                <a:latin typeface="Noto Sans CJK JP"/>
-                <a:ea typeface="Noto Sans CJK JP"/>
-                <a:cs typeface="Noto Sans CJK JP"/>
-              </a:defRPr>
-            </a:pPr>
-            <a:r>
-              <a:rPr sz="998" b="1">
-                <a:solidFill>
-                  <a:srgbClr val="4A90E2"/>
-                </a:solidFill>
-                <a:latin typeface="Noto Sans CJK JP"/>
-                <a:ea typeface="Noto Sans CJK JP"/>
-                <a:cs typeface="Noto Sans CJK JP"/>
-              </a:rPr>
-              <a:t>1 前提</a:t>
-            </a:r>
-          </a:p>
-        </p:txBody>
-      </p:sp>
-      <p:sp>
-        <p:nvSpPr>
-          <p:cNvPr id="15" name="chapter-tab-2">
-            <a:extLst>
-              <a:ext uri="{FF2B5EF4-FFF2-40B4-BE49-F238E27FC236}">
-                <a16:creationId xmlns:a16="http://schemas.microsoft.com/office/drawing/2014/main" id="{E6FC141E-0AA0-4467-B597-5526027598D3}"/>
-              </a:ext>
-            </a:extLst>
-          </p:cNvPr>
-          <p:cNvSpPr>
-            <a:spLocks noGrp="1"/>
-          </p:cNvSpPr>
-          <p:nvPr/>
-        </p:nvSpPr>
-        <p:spPr>
-          <a:xfrm>
-            <a:off x="2428875" y="4857750"/>
-            <a:ext cx="2057400" cy="238125"/>
-          </a:xfrm>
-          <a:prstGeom prst="parallelogram">
-            <a:avLst/>
-          </a:prstGeom>
-          <a:solidFill>
-            <a:srgbClr val="FFFFFF"/>
-          </a:solidFill>
-          <a:ln w="10001">
-            <a:solidFill>
-              <a:srgbClr val="2F73B7"/>
-            </a:solidFill>
-            <a:prstDash val="solid"/>
-          </a:ln>
-        </p:spPr>
-        <p:txBody>
-          <a:bodyPr wrap="none" lIns="76200" tIns="0" rIns="76200" bIns="0" anchor="ctr">
-            <a:normAutofit/>
-          </a:bodyPr>
-          <a:lstStyle/>
-          <a:p>
-            <a:pPr algn="ctr">
-              <a:buNone/>
-              <a:defRPr sz="998" b="1">
-                <a:solidFill>
-                  <a:srgbClr val="2F73B7"/>
-                </a:solidFill>
-                <a:latin typeface="Noto Sans CJK JP"/>
-                <a:ea typeface="Noto Sans CJK JP"/>
-                <a:cs typeface="Noto Sans CJK JP"/>
-              </a:defRPr>
-            </a:pPr>
-            <a:r>
-              <a:rPr sz="998" b="1">
-                <a:solidFill>
-                  <a:srgbClr val="2F73B7"/>
-                </a:solidFill>
-                <a:latin typeface="Noto Sans CJK JP"/>
-                <a:ea typeface="Noto Sans CJK JP"/>
-                <a:cs typeface="Noto Sans CJK JP"/>
-              </a:rPr>
-              <a:t>2 数理理論</a:t>
-            </a:r>
-          </a:p>
-        </p:txBody>
-      </p:sp>
-      <p:sp>
-        <p:nvSpPr>
-          <p:cNvPr id="16" name="chapter-tab-3">
-            <a:extLst>
-              <a:ext uri="{FF2B5EF4-FFF2-40B4-BE49-F238E27FC236}">
-                <a16:creationId xmlns:a16="http://schemas.microsoft.com/office/drawing/2014/main" id="{AC819209-05D9-4973-88CB-41E4E80B4ACF}"/>
-              </a:ext>
-            </a:extLst>
-          </p:cNvPr>
-          <p:cNvSpPr>
-            <a:spLocks noGrp="1"/>
-          </p:cNvSpPr>
-          <p:nvPr/>
-        </p:nvSpPr>
-        <p:spPr>
-          <a:xfrm>
-            <a:off x="4400550" y="4857750"/>
-            <a:ext cx="2057400" cy="238125"/>
-          </a:xfrm>
-          <a:prstGeom prst="parallelogram">
-            <a:avLst/>
-          </a:prstGeom>
-          <a:solidFill>
-            <a:srgbClr val="2A8F6A"/>
-          </a:solidFill>
-          <a:ln w="11430">
-            <a:solidFill>
-              <a:srgbClr val="2A8F6A"/>
-            </a:solidFill>
-            <a:prstDash val="solid"/>
-          </a:ln>
-        </p:spPr>
-        <p:txBody>
-          <a:bodyPr wrap="none" lIns="76200" tIns="0" rIns="76200" bIns="0" anchor="ctr">
-            <a:normAutofit/>
-          </a:bodyPr>
-          <a:lstStyle/>
-          <a:p>
-            <a:pPr algn="ctr">
-              <a:buNone/>
-              <a:defRPr sz="998" b="1">
-                <a:solidFill>
-                  <a:srgbClr val="FFFFFF"/>
-                </a:solidFill>
-                <a:latin typeface="Noto Sans CJK JP"/>
-                <a:ea typeface="Noto Sans CJK JP"/>
-                <a:cs typeface="Noto Sans CJK JP"/>
-              </a:defRPr>
-            </a:pPr>
-            <a:r>
-              <a:rPr sz="998" b="1">
-                <a:solidFill>
-                  <a:srgbClr val="FFFFFF"/>
-                </a:solidFill>
-                <a:latin typeface="Noto Sans CJK JP"/>
-                <a:ea typeface="Noto Sans CJK JP"/>
-                <a:cs typeface="Noto Sans CJK JP"/>
-              </a:rPr>
-              <a:t>3 シミュレーション</a:t>
-            </a:r>
-          </a:p>
-        </p:txBody>
-      </p:sp>
-      <p:sp>
-        <p:nvSpPr>
-          <p:cNvPr id="17" name="chapter-tab-4">
-            <a:extLst>
-              <a:ext uri="{FF2B5EF4-FFF2-40B4-BE49-F238E27FC236}">
-                <a16:creationId xmlns:a16="http://schemas.microsoft.com/office/drawing/2014/main" id="{6894EFE3-FD40-4A80-87F2-8FD953DC25B2}"/>
-              </a:ext>
-            </a:extLst>
-          </p:cNvPr>
-          <p:cNvSpPr>
-            <a:spLocks noGrp="1"/>
-          </p:cNvSpPr>
-          <p:nvPr/>
-        </p:nvSpPr>
-        <p:spPr>
-          <a:xfrm>
-            <a:off x="6372225" y="4857750"/>
-            <a:ext cx="2057400" cy="238125"/>
-          </a:xfrm>
-          <a:prstGeom prst="parallelogram">
-            <a:avLst/>
-          </a:prstGeom>
-          <a:solidFill>
-            <a:srgbClr val="FFFFFF"/>
-          </a:solidFill>
-          <a:ln w="10001">
-            <a:solidFill>
-              <a:srgbClr val="C9534B"/>
-            </a:solidFill>
-            <a:prstDash val="solid"/>
-          </a:ln>
-        </p:spPr>
-        <p:txBody>
-          <a:bodyPr wrap="none" lIns="76200" tIns="0" rIns="76200" bIns="0" anchor="ctr">
-            <a:normAutofit/>
-          </a:bodyPr>
-          <a:lstStyle/>
-          <a:p>
-            <a:pPr algn="ctr">
-              <a:buNone/>
-              <a:defRPr sz="998" b="1">
-                <a:solidFill>
-                  <a:srgbClr val="C9534B"/>
-                </a:solidFill>
-                <a:latin typeface="Noto Sans CJK JP"/>
-                <a:ea typeface="Noto Sans CJK JP"/>
-                <a:cs typeface="Noto Sans CJK JP"/>
-              </a:defRPr>
-            </a:pPr>
-            <a:r>
-              <a:rPr sz="998" b="1">
-                <a:solidFill>
-                  <a:srgbClr val="C9534B"/>
-                </a:solidFill>
-                <a:latin typeface="Noto Sans CJK JP"/>
-                <a:ea typeface="Noto Sans CJK JP"/>
-                <a:cs typeface="Noto Sans CJK JP"/>
-              </a:rPr>
-              <a:t>4 結論</a:t>
-            </a:r>
-          </a:p>
-        </p:txBody>
-      </p:sp>
-      <p:sp>
-        <p:nvSpPr>
-          <p:cNvPr id="18" name="s12-left-head">
-            <a:extLst>
-              <a:ext uri="{FF2B5EF4-FFF2-40B4-BE49-F238E27FC236}">
-                <a16:creationId xmlns:a16="http://schemas.microsoft.com/office/drawing/2014/main" id="{78E4D0AD-4504-40AC-9914-8FB0515ADC64}"/>
-              </a:ext>
-            </a:extLst>
-          </p:cNvPr>
-          <p:cNvSpPr>
-            <a:spLocks noGrp="1"/>
-          </p:cNvSpPr>
-          <p:nvPr/>
-        </p:nvSpPr>
-        <p:spPr>
-          <a:xfrm>
-            <a:off x="590550" y="1781175"/>
-            <a:ext cx="1714500" cy="238125"/>
-          </a:xfrm>
-          <a:prstGeom prst="rect">
-            <a:avLst/>
-          </a:prstGeom>
-          <a:noFill/>
-          <a:ln w="0">
-            <a:noFill/>
-            <a:prstDash val="solid"/>
-          </a:ln>
-        </p:spPr>
-        <p:txBody>
-          <a:bodyPr wrap="square" lIns="0" tIns="0" rIns="0" bIns="0" anchor="ctr">
-            <a:normAutofit/>
-          </a:bodyPr>
-          <a:lstStyle/>
-          <a:p>
-            <a:pPr algn="l">
-              <a:defRPr sz="1425" b="1">
-                <a:solidFill>
-                  <a:srgbClr val="16875C"/>
-                </a:solidFill>
-                <a:latin typeface="Arial"/>
-                <a:ea typeface="Arial"/>
-                <a:cs typeface="Arial"/>
-              </a:defRPr>
-            </a:pPr>
-            <a:r>
-              <a:rPr sz="1425" b="1">
-                <a:solidFill>
-                  <a:srgbClr val="16875C"/>
-                </a:solidFill>
-                <a:latin typeface="Arial"/>
-                <a:ea typeface="Arial"/>
-                <a:cs typeface="Arial"/>
-              </a:rPr>
-              <a:t>cTCMV</a:t>
-            </a:r>
-          </a:p>
-        </p:txBody>
-      </p:sp>
-      <p:sp>
-        <p:nvSpPr>
-          <p:cNvPr id="19" name="s12-right-head">
-            <a:extLst>
-              <a:ext uri="{FF2B5EF4-FFF2-40B4-BE49-F238E27FC236}">
-                <a16:creationId xmlns:a16="http://schemas.microsoft.com/office/drawing/2014/main" id="{463CD3BC-7AE2-4FD4-ADBF-DFE81E3E38F2}"/>
-              </a:ext>
-            </a:extLst>
-          </p:cNvPr>
-          <p:cNvSpPr>
-            <a:spLocks noGrp="1"/>
-          </p:cNvSpPr>
-          <p:nvPr/>
-        </p:nvSpPr>
-        <p:spPr>
-          <a:xfrm>
-            <a:off x="5000625" y="1781175"/>
-            <a:ext cx="1714500" cy="238125"/>
-          </a:xfrm>
-          <a:prstGeom prst="rect">
-            <a:avLst/>
-          </a:prstGeom>
-          <a:noFill/>
-          <a:ln w="0">
-            <a:noFill/>
-            <a:prstDash val="solid"/>
-          </a:ln>
-        </p:spPr>
-        <p:txBody>
-          <a:bodyPr wrap="square" lIns="0" tIns="0" rIns="0" bIns="0" anchor="ctr">
-            <a:normAutofit/>
-          </a:bodyPr>
-          <a:lstStyle/>
-          <a:p>
-            <a:pPr algn="l">
-              <a:defRPr sz="1425" b="1">
-                <a:solidFill>
-                  <a:srgbClr val="D94138"/>
-                </a:solidFill>
-                <a:latin typeface="Arial"/>
-                <a:ea typeface="Arial"/>
-                <a:cs typeface="Arial"/>
-              </a:defRPr>
-            </a:pPr>
-            <a:r>
-              <a:rPr sz="1425" b="1">
-                <a:solidFill>
-                  <a:srgbClr val="D94138"/>
-                </a:solidFill>
-                <a:latin typeface="Arial"/>
-                <a:ea typeface="Arial"/>
-                <a:cs typeface="Arial"/>
-              </a:rPr>
-              <a:t>dTCMV</a:t>
-            </a:r>
-          </a:p>
-        </p:txBody>
-      </p:sp>
-      <p:sp>
-        <p:nvSpPr>
-          <p:cNvPr id="20" name="s12-left-head-rule">
-            <a:extLst>
-              <a:ext uri="{FF2B5EF4-FFF2-40B4-BE49-F238E27FC236}">
-                <a16:creationId xmlns:a16="http://schemas.microsoft.com/office/drawing/2014/main" id="{2E1D0382-2CC6-460E-A667-9CE5E3978499}"/>
-              </a:ext>
-            </a:extLst>
-          </p:cNvPr>
-          <p:cNvSpPr>
-            <a:spLocks noGrp="1"/>
-          </p:cNvSpPr>
-          <p:nvPr/>
-        </p:nvSpPr>
-        <p:spPr>
-          <a:xfrm>
-            <a:off x="590550" y="2057400"/>
-            <a:ext cx="3524250" cy="11430"/>
-          </a:xfrm>
-          <a:prstGeom prst="rect">
-            <a:avLst/>
-          </a:prstGeom>
-          <a:solidFill>
-            <a:srgbClr val="16875C"/>
-          </a:solidFill>
-          <a:ln w="0">
-            <a:noFill/>
-            <a:prstDash val="solid"/>
-          </a:ln>
-        </p:spPr>
-      </p:sp>
-      <p:sp>
-        <p:nvSpPr>
-          <p:cNvPr id="21" name="s12-right-head-rule">
-            <a:extLst>
-              <a:ext uri="{FF2B5EF4-FFF2-40B4-BE49-F238E27FC236}">
-                <a16:creationId xmlns:a16="http://schemas.microsoft.com/office/drawing/2014/main" id="{B839F67B-3BF8-4232-8664-3833D87B66C5}"/>
-              </a:ext>
-            </a:extLst>
-          </p:cNvPr>
-          <p:cNvSpPr>
-            <a:spLocks noGrp="1"/>
-          </p:cNvSpPr>
-          <p:nvPr/>
-        </p:nvSpPr>
-        <p:spPr>
-          <a:xfrm>
-            <a:off x="5000625" y="2057400"/>
-            <a:ext cx="3524250" cy="11430"/>
-          </a:xfrm>
-          <a:prstGeom prst="rect">
-            <a:avLst/>
-          </a:prstGeom>
-          <a:solidFill>
-            <a:srgbClr val="D94138"/>
-          </a:solidFill>
-          <a:ln w="0">
-            <a:noFill/>
-            <a:prstDash val="solid"/>
-          </a:ln>
-        </p:spPr>
-      </p:sp>
-      <p:pic>
-        <p:nvPicPr>
-          <p:cNvPr id="40" name="図 39"/>
-          <p:cNvPicPr>
-            <a:picLocks noChangeAspect="1"/>
-          </p:cNvPicPr>
-          <p:nvPr/>
-        </p:nvPicPr>
-        <p:blipFill>
-          <a:blip r:embed="rId3"/>
-          <a:stretch/>
-        </p:blipFill>
-        <p:spPr>
-          <a:xfrm>
-            <a:off x="498634" y="2095500"/>
-            <a:ext cx="3850957" cy="2343150"/>
-          </a:xfrm>
-          <a:prstGeom prst="rect">
-            <a:avLst/>
-          </a:prstGeom>
-        </p:spPr>
-      </p:pic>
-      <p:pic>
-        <p:nvPicPr>
-          <p:cNvPr id="41" name="図 40"/>
-          <p:cNvPicPr>
-            <a:picLocks noChangeAspect="1"/>
-          </p:cNvPicPr>
-          <p:nvPr/>
-        </p:nvPicPr>
-        <p:blipFill>
-          <a:blip r:embed="rId4"/>
-          <a:stretch/>
-        </p:blipFill>
-        <p:spPr>
-          <a:xfrm>
-            <a:off x="4839379" y="2095500"/>
-            <a:ext cx="3850957" cy="2343150"/>
-          </a:xfrm>
-          <a:prstGeom prst="rect">
-            <a:avLst/>
-          </a:prstGeom>
-        </p:spPr>
-      </p:pic>
-      <p:sp>
-        <p:nvSpPr>
-          <p:cNvPr id="24" name="s12-left-cap1">
-            <a:extLst>
-              <a:ext uri="{FF2B5EF4-FFF2-40B4-BE49-F238E27FC236}">
-                <a16:creationId xmlns:a16="http://schemas.microsoft.com/office/drawing/2014/main" id="{9D00CD1D-D96D-4F27-91BC-90A68C480ED0}"/>
-              </a:ext>
-            </a:extLst>
-          </p:cNvPr>
-          <p:cNvSpPr>
-            <a:spLocks noGrp="1"/>
-          </p:cNvSpPr>
-          <p:nvPr/>
-        </p:nvSpPr>
-        <p:spPr>
-          <a:xfrm>
-            <a:off x="552610" y="4352925"/>
-            <a:ext cx="3048000" cy="180975"/>
-          </a:xfrm>
-          <a:prstGeom prst="rect">
-            <a:avLst/>
-          </a:prstGeom>
-          <a:noFill/>
-          <a:ln w="0">
-            <a:noFill/>
-            <a:prstDash val="solid"/>
-          </a:ln>
-        </p:spPr>
-        <p:txBody>
-          <a:bodyPr wrap="square" lIns="0" tIns="0" rIns="0" bIns="0" anchor="ctr">
-            <a:normAutofit/>
-          </a:bodyPr>
-          <a:lstStyle/>
-          <a:p>
-            <a:pPr algn="ctr">
-              <a:defRPr sz="1050" b="1">
-                <a:solidFill>
-                  <a:srgbClr val="16875C"/>
-                </a:solidFill>
-                <a:latin typeface="Noto Sans CJK JP"/>
-                <a:ea typeface="Noto Sans CJK JP"/>
-                <a:cs typeface="Noto Sans CJK JP"/>
-              </a:defRPr>
-            </a:pPr>
-            <a:r>
-              <a:rPr sz="1050" b="1" dirty="0" err="1">
-                <a:solidFill>
-                  <a:srgbClr val="16875C"/>
-                </a:solidFill>
-                <a:latin typeface="Noto Sans CJK JP"/>
-                <a:ea typeface="Noto Sans CJK JP"/>
-                <a:cs typeface="Noto Sans CJK JP"/>
-              </a:rPr>
-              <a:t>低残高では上限制約</a:t>
-            </a:r>
-            <a:endParaRPr sz="1050" b="1" dirty="0">
-              <a:solidFill>
-                <a:srgbClr val="16875C"/>
-              </a:solidFill>
-              <a:latin typeface="Noto Sans CJK JP"/>
-              <a:ea typeface="Noto Sans CJK JP"/>
-              <a:cs typeface="Noto Sans CJK JP"/>
-            </a:endParaRPr>
-          </a:p>
-        </p:txBody>
-      </p:sp>
-      <p:sp>
-        <p:nvSpPr>
-          <p:cNvPr id="25" name="s12-left-cap2">
-            <a:extLst>
-              <a:ext uri="{FF2B5EF4-FFF2-40B4-BE49-F238E27FC236}">
-                <a16:creationId xmlns:a16="http://schemas.microsoft.com/office/drawing/2014/main" id="{D432AAB6-C392-4491-ADBF-1607C3F0434D}"/>
-              </a:ext>
-            </a:extLst>
-          </p:cNvPr>
-          <p:cNvSpPr>
-            <a:spLocks noGrp="1"/>
-          </p:cNvSpPr>
-          <p:nvPr/>
-        </p:nvSpPr>
-        <p:spPr>
-          <a:xfrm>
-            <a:off x="552610" y="4533900"/>
-            <a:ext cx="3048000" cy="171450"/>
-          </a:xfrm>
-          <a:prstGeom prst="rect">
-            <a:avLst/>
-          </a:prstGeom>
-          <a:noFill/>
-          <a:ln w="0">
-            <a:noFill/>
-            <a:prstDash val="solid"/>
-          </a:ln>
-        </p:spPr>
-        <p:txBody>
-          <a:bodyPr wrap="square" lIns="0" tIns="0" rIns="0" bIns="0" anchor="ctr">
-            <a:normAutofit/>
-          </a:bodyPr>
-          <a:lstStyle/>
-          <a:p>
-            <a:pPr algn="ctr">
-              <a:defRPr sz="953" b="0">
-                <a:solidFill>
-                  <a:srgbClr val="16875C"/>
-                </a:solidFill>
-                <a:latin typeface="Noto Sans CJK JP"/>
-                <a:ea typeface="Noto Sans CJK JP"/>
-                <a:cs typeface="Noto Sans CJK JP"/>
-              </a:defRPr>
-            </a:pPr>
-            <a:r>
-              <a:rPr sz="953" b="0">
-                <a:solidFill>
-                  <a:srgbClr val="16875C"/>
-                </a:solidFill>
-                <a:latin typeface="Noto Sans CJK JP"/>
-                <a:ea typeface="Noto Sans CJK JP"/>
-                <a:cs typeface="Noto Sans CJK JP"/>
-              </a:rPr>
-              <a:t>内点では全面一定型へ</a:t>
-            </a:r>
-          </a:p>
-        </p:txBody>
-      </p:sp>
-      <p:sp>
-        <p:nvSpPr>
-          <p:cNvPr id="26" name="s12-right-cap1">
-            <a:extLst>
-              <a:ext uri="{FF2B5EF4-FFF2-40B4-BE49-F238E27FC236}">
-                <a16:creationId xmlns:a16="http://schemas.microsoft.com/office/drawing/2014/main" id="{E26FBBC0-8057-40DB-98CA-20883B0EB552}"/>
-              </a:ext>
-            </a:extLst>
-          </p:cNvPr>
-          <p:cNvSpPr>
-            <a:spLocks noGrp="1"/>
-          </p:cNvSpPr>
-          <p:nvPr/>
-        </p:nvSpPr>
-        <p:spPr>
-          <a:xfrm>
-            <a:off x="5191125" y="4352925"/>
-            <a:ext cx="3048000" cy="180975"/>
-          </a:xfrm>
-          <a:prstGeom prst="rect">
-            <a:avLst/>
-          </a:prstGeom>
-          <a:noFill/>
-          <a:ln w="0">
-            <a:noFill/>
-            <a:prstDash val="solid"/>
-          </a:ln>
-        </p:spPr>
-        <p:txBody>
-          <a:bodyPr wrap="square" lIns="0" tIns="0" rIns="0" bIns="0" anchor="ctr">
-            <a:normAutofit/>
-          </a:bodyPr>
-          <a:lstStyle/>
-          <a:p>
-            <a:pPr algn="ctr">
-              <a:defRPr sz="1050" b="1">
-                <a:solidFill>
-                  <a:srgbClr val="D94138"/>
-                </a:solidFill>
-                <a:latin typeface="Noto Sans CJK JP"/>
-                <a:ea typeface="Noto Sans CJK JP"/>
-                <a:cs typeface="Noto Sans CJK JP"/>
-              </a:defRPr>
-            </a:pPr>
-            <a:r>
-              <a:rPr sz="1050" b="1">
-                <a:solidFill>
-                  <a:srgbClr val="D94138"/>
-                </a:solidFill>
-                <a:latin typeface="Noto Sans CJK JP"/>
-                <a:ea typeface="Noto Sans CJK JP"/>
-                <a:cs typeface="Noto Sans CJK JP"/>
-              </a:rPr>
-              <a:t>総年金富に応じた</a:t>
-            </a:r>
-          </a:p>
-        </p:txBody>
-      </p:sp>
-      <p:sp>
-        <p:nvSpPr>
-          <p:cNvPr id="27" name="s12-right-cap2">
-            <a:extLst>
-              <a:ext uri="{FF2B5EF4-FFF2-40B4-BE49-F238E27FC236}">
-                <a16:creationId xmlns:a16="http://schemas.microsoft.com/office/drawing/2014/main" id="{A127FC6D-BF6E-4CC8-8390-4CD90031FEF0}"/>
-              </a:ext>
-            </a:extLst>
-          </p:cNvPr>
-          <p:cNvSpPr>
-            <a:spLocks noGrp="1"/>
-          </p:cNvSpPr>
-          <p:nvPr/>
-        </p:nvSpPr>
-        <p:spPr>
-          <a:xfrm>
-            <a:off x="5191125" y="4533900"/>
-            <a:ext cx="3048000" cy="171450"/>
-          </a:xfrm>
-          <a:prstGeom prst="rect">
-            <a:avLst/>
-          </a:prstGeom>
-          <a:noFill/>
-          <a:ln w="0">
-            <a:noFill/>
-            <a:prstDash val="solid"/>
-          </a:ln>
-        </p:spPr>
-        <p:txBody>
-          <a:bodyPr wrap="square" lIns="0" tIns="0" rIns="0" bIns="0" anchor="ctr">
-            <a:normAutofit/>
-          </a:bodyPr>
-          <a:lstStyle/>
-          <a:p>
-            <a:pPr algn="ctr">
-              <a:defRPr sz="953" b="0">
-                <a:solidFill>
-                  <a:srgbClr val="D94138"/>
-                </a:solidFill>
-                <a:latin typeface="Noto Sans CJK JP"/>
-                <a:ea typeface="Noto Sans CJK JP"/>
-                <a:cs typeface="Noto Sans CJK JP"/>
-              </a:defRPr>
-            </a:pPr>
-            <a:r>
-              <a:rPr sz="953" b="0">
-                <a:solidFill>
-                  <a:srgbClr val="D94138"/>
-                </a:solidFill>
-                <a:latin typeface="Noto Sans CJK JP"/>
-                <a:ea typeface="Noto Sans CJK JP"/>
-                <a:cs typeface="Noto Sans CJK JP"/>
-              </a:rPr>
-              <a:t>状態比例的な内点制御</a:t>
-            </a:r>
-          </a:p>
-        </p:txBody>
-      </p:sp>
-      <p:sp>
-        <p:nvSpPr>
-          <p:cNvPr id="28" name="s12-bottom">
-            <a:extLst>
-              <a:ext uri="{FF2B5EF4-FFF2-40B4-BE49-F238E27FC236}">
-                <a16:creationId xmlns:a16="http://schemas.microsoft.com/office/drawing/2014/main" id="{CDE4D720-7155-482B-97A5-ABD86492C6CA}"/>
-              </a:ext>
-            </a:extLst>
-          </p:cNvPr>
-          <p:cNvSpPr>
-            <a:spLocks noGrp="1"/>
-          </p:cNvSpPr>
-          <p:nvPr/>
-        </p:nvSpPr>
-        <p:spPr>
-          <a:xfrm>
-            <a:off x="1952625" y="4705350"/>
-            <a:ext cx="5238750" cy="133350"/>
-          </a:xfrm>
-          <a:prstGeom prst="rect">
-            <a:avLst/>
-          </a:prstGeom>
-          <a:noFill/>
-          <a:ln w="0">
-            <a:noFill/>
-            <a:prstDash val="solid"/>
-          </a:ln>
-        </p:spPr>
-        <p:txBody>
-          <a:bodyPr wrap="square" lIns="0" tIns="0" rIns="0" bIns="0" anchor="ctr">
-            <a:normAutofit fontScale="99658" lnSpcReduction="10000"/>
-          </a:bodyPr>
-          <a:lstStyle/>
-          <a:p>
-            <a:pPr algn="ctr">
-              <a:defRPr sz="878" b="1">
-                <a:solidFill>
-                  <a:srgbClr val="215FB4"/>
-                </a:solidFill>
-                <a:latin typeface="Noto Sans CJK JP"/>
-                <a:ea typeface="Noto Sans CJK JP"/>
-                <a:cs typeface="Noto Sans CJK JP"/>
-              </a:defRPr>
-            </a:pPr>
-            <a:r>
-              <a:rPr sz="878" b="1">
-                <a:solidFill>
-                  <a:srgbClr val="215FB4"/>
-                </a:solidFill>
-                <a:latin typeface="Noto Sans CJK JP"/>
-                <a:ea typeface="Noto Sans CJK JP"/>
-                <a:cs typeface="Noto Sans CJK JP"/>
-              </a:rPr>
-              <a:t>グライドパスは一本の年齢曲線ではなく、時間と残高の面である</a:t>
-            </a:r>
-          </a:p>
-        </p:txBody>
-      </p:sp>
-    </p:spTree>
-    <p:extLst>
-      <p:ext uri="{BB962C8B-B14F-4D97-AF65-F5344CB8AC3E}">
-        <p14:creationId xmlns:p14="http://schemas.microsoft.com/office/powerpoint/2010/main" val="875397706"/>
-      </p:ext>
-    </p:extLst>
-  </p:cSld>
-  <p:clrMapOvr>
-    <a:masterClrMapping/>
-  </p:clrMapOvr>
-</p:sld>
-</file>
-
-<file path=ppt/slides/slide15.xml><?xml version="1.0" encoding="utf-8"?>
-<p:sld xmlns:a="http://schemas.openxmlformats.org/drawingml/2006/main" xmlns:r="http://schemas.openxmlformats.org/officeDocument/2006/relationships" xmlns:p="http://schemas.openxmlformats.org/presentationml/2006/main">
-  <p:cSld>
-    <p:spTree>
-      <p:nvGrpSpPr>
-        <p:cNvPr id="1" name=""/>
-        <p:cNvGrpSpPr/>
-        <p:nvPr/>
-      </p:nvGrpSpPr>
-      <p:grpSpPr>
-        <a:xfrm>
-          <a:off x="0" y="0"/>
-          <a:ext cx="0" cy="0"/>
-          <a:chOff x="0" y="0"/>
-          <a:chExt cx="0" cy="0"/>
-        </a:xfrm>
-      </p:grpSpPr>
-      <p:sp>
-        <p:nvSpPr>
-          <p:cNvPr id="2" name="Title 1">
-            <a:extLst>
-              <a:ext uri="{FF2B5EF4-FFF2-40B4-BE49-F238E27FC236}">
-                <a16:creationId xmlns:a16="http://schemas.microsoft.com/office/drawing/2014/main" id="{D2EB5FB2-DE08-01C4-4B0F-3D45E31A046E}"/>
-              </a:ext>
-            </a:extLst>
-          </p:cNvPr>
-          <p:cNvSpPr>
-            <a:spLocks noGrp="1"/>
-          </p:cNvSpPr>
-          <p:nvPr>
-            <p:ph type="title"/>
-          </p:nvPr>
-        </p:nvSpPr>
-        <p:spPr>
-          <a:xfrm>
-            <a:off x="457200" y="990600"/>
-            <a:ext cx="8229600" cy="609600"/>
-          </a:xfrm>
-        </p:spPr>
-        <p:txBody>
-          <a:bodyPr wrap="none" lIns="0" tIns="0" rIns="0" bIns="0" anchor="ctr">
-            <a:normAutofit/>
-          </a:bodyPr>
-          <a:lstStyle/>
-          <a:p>
-            <a:pPr algn="l">
-              <a:buNone/>
               <a:defRPr sz="2100" b="1">
                 <a:solidFill>
                   <a:srgbClr val="111827"/>
@@ -15642,7 +14626,7 @@
 </p:sld>
 </file>
 
-<file path=ppt/slides/slide16.xml><?xml version="1.0" encoding="utf-8"?>
+<file path=ppt/slides/slide15.xml><?xml version="1.0" encoding="utf-8"?>
 <p:sld xmlns:a="http://schemas.openxmlformats.org/drawingml/2006/main" xmlns:r="http://schemas.openxmlformats.org/officeDocument/2006/relationships" xmlns:p="http://schemas.openxmlformats.org/presentationml/2006/main">
   <p:cSld>
     <p:spTree>
@@ -16223,7 +15207,7 @@
 </p:sld>
 </file>
 
-<file path=ppt/slides/slide17.xml><?xml version="1.0" encoding="utf-8"?>
+<file path=ppt/slides/slide16.xml><?xml version="1.0" encoding="utf-8"?>
 <p:sld xmlns:a="http://schemas.openxmlformats.org/drawingml/2006/main" xmlns:r="http://schemas.openxmlformats.org/officeDocument/2006/relationships" xmlns:p="http://schemas.openxmlformats.org/presentationml/2006/main">
   <p:cSld>
     <p:spTree>
@@ -16795,6 +15779,797 @@
     <p:extLst>
       <p:ext uri="{BB962C8B-B14F-4D97-AF65-F5344CB8AC3E}">
         <p14:creationId xmlns:p14="http://schemas.microsoft.com/office/powerpoint/2010/main" val="327434395"/>
+      </p:ext>
+    </p:extLst>
+  </p:cSld>
+  <p:clrMapOvr>
+    <a:masterClrMapping/>
+  </p:clrMapOvr>
+</p:sld>
+</file>
+
+<file path=ppt/slides/slide17.xml><?xml version="1.0" encoding="utf-8"?>
+<p:sld xmlns:a="http://schemas.openxmlformats.org/drawingml/2006/main" xmlns:r="http://schemas.openxmlformats.org/officeDocument/2006/relationships" xmlns:p="http://schemas.openxmlformats.org/presentationml/2006/main">
+  <p:cSld>
+    <p:spTree>
+      <p:nvGrpSpPr>
+        <p:cNvPr id="1" name="">
+          <a:extLst>
+            <a:ext uri="{FF2B5EF4-FFF2-40B4-BE49-F238E27FC236}">
+              <a16:creationId xmlns:a16="http://schemas.microsoft.com/office/drawing/2014/main" id="{0A35D741-D0A4-6926-0956-CE16D77E8F8F}"/>
+            </a:ext>
+          </a:extLst>
+        </p:cNvPr>
+        <p:cNvGrpSpPr/>
+        <p:nvPr/>
+      </p:nvGrpSpPr>
+      <p:grpSpPr>
+        <a:xfrm>
+          <a:off x="0" y="0"/>
+          <a:ext cx="0" cy="0"/>
+          <a:chOff x="0" y="0"/>
+          <a:chExt cx="0" cy="0"/>
+        </a:xfrm>
+      </p:grpSpPr>
+      <p:pic>
+        <p:nvPicPr>
+          <p:cNvPr id="19" name="グラフィックス 18">
+            <a:extLst>
+              <a:ext uri="{FF2B5EF4-FFF2-40B4-BE49-F238E27FC236}">
+                <a16:creationId xmlns:a16="http://schemas.microsoft.com/office/drawing/2014/main" id="{819D0F04-C253-A9E8-4FCD-434065592A4A}"/>
+              </a:ext>
+            </a:extLst>
+          </p:cNvPr>
+          <p:cNvPicPr>
+            <a:picLocks noChangeAspect="1"/>
+          </p:cNvPicPr>
+          <p:nvPr/>
+        </p:nvPicPr>
+        <p:blipFill>
+          <a:blip r:embed="rId3">
+            <a:extLst>
+              <a:ext uri="{28A0092B-C50C-407E-A947-70E740481C1C}">
+                <a14:useLocalDpi xmlns:a14="http://schemas.microsoft.com/office/drawing/2010/main" val="0"/>
+              </a:ext>
+            </a:extLst>
+          </a:blip>
+          <a:srcRect/>
+          <a:stretch/>
+        </p:blipFill>
+        <p:spPr>
+          <a:xfrm>
+            <a:off x="572568" y="1706040"/>
+            <a:ext cx="4246770" cy="3170125"/>
+          </a:xfrm>
+          <a:prstGeom prst="rect">
+            <a:avLst/>
+          </a:prstGeom>
+        </p:spPr>
+      </p:pic>
+      <p:sp>
+        <p:nvSpPr>
+          <p:cNvPr id="2" name="Title 1">
+            <a:extLst>
+              <a:ext uri="{FF2B5EF4-FFF2-40B4-BE49-F238E27FC236}">
+                <a16:creationId xmlns:a16="http://schemas.microsoft.com/office/drawing/2014/main" id="{78B1E1CA-07AD-C9DB-1BCC-AEF24D325ED8}"/>
+              </a:ext>
+            </a:extLst>
+          </p:cNvPr>
+          <p:cNvSpPr>
+            <a:spLocks noGrp="1"/>
+          </p:cNvSpPr>
+          <p:nvPr>
+            <p:ph type="title"/>
+          </p:nvPr>
+        </p:nvSpPr>
+        <p:spPr>
+          <a:xfrm>
+            <a:off x="457200" y="990600"/>
+            <a:ext cx="8229600" cy="609600"/>
+          </a:xfrm>
+        </p:spPr>
+        <p:txBody>
+          <a:bodyPr wrap="none" lIns="0" tIns="0" rIns="0" bIns="0" anchor="ctr">
+            <a:normAutofit/>
+          </a:bodyPr>
+          <a:lstStyle/>
+          <a:p>
+            <a:pPr algn="l">
+              <a:defRPr sz="2100" b="1">
+                <a:solidFill>
+                  <a:srgbClr val="111827"/>
+                </a:solidFill>
+                <a:latin typeface="Noto Sans CJK JP"/>
+                <a:ea typeface="Noto Sans CJK JP"/>
+                <a:cs typeface="Noto Sans CJK JP"/>
+              </a:defRPr>
+            </a:pPr>
+            <a:r>
+              <a:rPr lang="ja-JP" altLang="en-US" sz="2100" dirty="0">
+                <a:solidFill>
+                  <a:srgbClr val="111827"/>
+                </a:solidFill>
+                <a:latin typeface="Noto Sans CJK JP"/>
+                <a:ea typeface="Noto Sans CJK JP"/>
+                <a:cs typeface="Noto Sans CJK JP"/>
+              </a:rPr>
+              <a:t>（参考）感応度　</a:t>
+            </a:r>
+            <a:r>
+              <a:rPr lang="en-US" altLang="ja-JP" sz="2100" dirty="0">
+                <a:solidFill>
+                  <a:srgbClr val="111827"/>
+                </a:solidFill>
+                <a:latin typeface="Noto Sans CJK JP"/>
+                <a:ea typeface="Noto Sans CJK JP"/>
+                <a:cs typeface="Noto Sans CJK JP"/>
+              </a:rPr>
+              <a:t>–</a:t>
+            </a:r>
+            <a:r>
+              <a:rPr lang="ja-JP" altLang="en-US" sz="2100" dirty="0">
+                <a:solidFill>
+                  <a:srgbClr val="FF0000"/>
+                </a:solidFill>
+                <a:latin typeface="Noto Sans CJK JP"/>
+                <a:ea typeface="Noto Sans CJK JP"/>
+                <a:cs typeface="Noto Sans CJK JP"/>
+              </a:rPr>
+              <a:t>総資産</a:t>
+            </a:r>
+            <a:r>
+              <a:rPr lang="en-US" altLang="ja-JP" sz="2100" dirty="0">
+                <a:solidFill>
+                  <a:srgbClr val="FF0000"/>
+                </a:solidFill>
+                <a:latin typeface="Noto Sans CJK JP"/>
+                <a:ea typeface="Noto Sans CJK JP"/>
+                <a:cs typeface="Noto Sans CJK JP"/>
+              </a:rPr>
+              <a:t>D</a:t>
+            </a:r>
+            <a:r>
+              <a:rPr lang="en-US" altLang="ja-JP" sz="2100" dirty="0">
+                <a:solidFill>
+                  <a:srgbClr val="111827"/>
+                </a:solidFill>
+                <a:latin typeface="Noto Sans CJK JP"/>
+                <a:ea typeface="Noto Sans CJK JP"/>
+                <a:cs typeface="Noto Sans CJK JP"/>
+              </a:rPr>
+              <a:t>–</a:t>
+            </a:r>
+            <a:endParaRPr sz="2100" b="1" dirty="0">
+              <a:solidFill>
+                <a:srgbClr val="111827"/>
+              </a:solidFill>
+              <a:latin typeface="Noto Sans CJK JP"/>
+              <a:ea typeface="Noto Sans CJK JP"/>
+              <a:cs typeface="Noto Sans CJK JP"/>
+            </a:endParaRPr>
+          </a:p>
+        </p:txBody>
+      </p:sp>
+      <p:sp>
+        <p:nvSpPr>
+          <p:cNvPr id="3" name="title-divider">
+            <a:extLst>
+              <a:ext uri="{FF2B5EF4-FFF2-40B4-BE49-F238E27FC236}">
+                <a16:creationId xmlns:a16="http://schemas.microsoft.com/office/drawing/2014/main" id="{5C994FD0-F429-75E7-F549-F0DB21988767}"/>
+              </a:ext>
+            </a:extLst>
+          </p:cNvPr>
+          <p:cNvSpPr>
+            <a:spLocks noGrp="1"/>
+          </p:cNvSpPr>
+          <p:nvPr/>
+        </p:nvSpPr>
+        <p:spPr>
+          <a:xfrm>
+            <a:off x="457200" y="1676400"/>
+            <a:ext cx="8229600" cy="9525"/>
+          </a:xfrm>
+          <a:prstGeom prst="rect">
+            <a:avLst/>
+          </a:prstGeom>
+          <a:solidFill>
+            <a:srgbClr val="E5EAF0"/>
+          </a:solidFill>
+          <a:ln w="0">
+            <a:noFill/>
+            <a:prstDash val="solid"/>
+          </a:ln>
+        </p:spPr>
+      </p:sp>
+      <p:sp>
+        <p:nvSpPr>
+          <p:cNvPr id="4" name="title-accent">
+            <a:extLst>
+              <a:ext uri="{FF2B5EF4-FFF2-40B4-BE49-F238E27FC236}">
+                <a16:creationId xmlns:a16="http://schemas.microsoft.com/office/drawing/2014/main" id="{37449EB8-87FF-C114-76C4-95FE54946385}"/>
+              </a:ext>
+            </a:extLst>
+          </p:cNvPr>
+          <p:cNvSpPr>
+            <a:spLocks noGrp="1"/>
+          </p:cNvSpPr>
+          <p:nvPr/>
+        </p:nvSpPr>
+        <p:spPr>
+          <a:xfrm>
+            <a:off x="457200" y="1666875"/>
+            <a:ext cx="552450" cy="38100"/>
+          </a:xfrm>
+          <a:prstGeom prst="rect">
+            <a:avLst/>
+          </a:prstGeom>
+          <a:solidFill>
+            <a:srgbClr val="4A90E2"/>
+          </a:solidFill>
+          <a:ln w="0">
+            <a:noFill/>
+            <a:prstDash val="solid"/>
+          </a:ln>
+        </p:spPr>
+      </p:sp>
+      <p:sp>
+        <p:nvSpPr>
+          <p:cNvPr id="10" name="chapter-tab-1">
+            <a:extLst>
+              <a:ext uri="{FF2B5EF4-FFF2-40B4-BE49-F238E27FC236}">
+                <a16:creationId xmlns:a16="http://schemas.microsoft.com/office/drawing/2014/main" id="{5D5F3346-7D9C-2338-374A-B7C24C0E17E9}"/>
+              </a:ext>
+            </a:extLst>
+          </p:cNvPr>
+          <p:cNvSpPr>
+            <a:spLocks noGrp="1"/>
+          </p:cNvSpPr>
+          <p:nvPr/>
+        </p:nvSpPr>
+        <p:spPr>
+          <a:xfrm>
+            <a:off x="457200" y="4857750"/>
+            <a:ext cx="2057400" cy="238125"/>
+          </a:xfrm>
+          <a:prstGeom prst="parallelogram">
+            <a:avLst/>
+          </a:prstGeom>
+          <a:solidFill>
+            <a:srgbClr val="FFFFFF"/>
+          </a:solidFill>
+          <a:ln w="10001">
+            <a:solidFill>
+              <a:srgbClr val="4A90E2"/>
+            </a:solidFill>
+            <a:prstDash val="solid"/>
+          </a:ln>
+        </p:spPr>
+        <p:txBody>
+          <a:bodyPr wrap="none" lIns="76200" tIns="0" rIns="76200" bIns="0" anchor="ctr">
+            <a:normAutofit/>
+          </a:bodyPr>
+          <a:lstStyle/>
+          <a:p>
+            <a:pPr algn="ctr">
+              <a:buNone/>
+              <a:defRPr sz="998" b="1">
+                <a:solidFill>
+                  <a:srgbClr val="4A90E2"/>
+                </a:solidFill>
+                <a:latin typeface="Noto Sans CJK JP"/>
+                <a:ea typeface="Noto Sans CJK JP"/>
+                <a:cs typeface="Noto Sans CJK JP"/>
+              </a:defRPr>
+            </a:pPr>
+            <a:r>
+              <a:rPr sz="998" b="1">
+                <a:solidFill>
+                  <a:srgbClr val="4A90E2"/>
+                </a:solidFill>
+                <a:latin typeface="Noto Sans CJK JP"/>
+                <a:ea typeface="Noto Sans CJK JP"/>
+                <a:cs typeface="Noto Sans CJK JP"/>
+              </a:rPr>
+              <a:t>1 前提</a:t>
+            </a:r>
+          </a:p>
+        </p:txBody>
+      </p:sp>
+      <p:sp>
+        <p:nvSpPr>
+          <p:cNvPr id="13" name="chapter-tab-2">
+            <a:extLst>
+              <a:ext uri="{FF2B5EF4-FFF2-40B4-BE49-F238E27FC236}">
+                <a16:creationId xmlns:a16="http://schemas.microsoft.com/office/drawing/2014/main" id="{22EA332F-2101-1ED0-E058-8C71BD1D5489}"/>
+              </a:ext>
+            </a:extLst>
+          </p:cNvPr>
+          <p:cNvSpPr>
+            <a:spLocks noGrp="1"/>
+          </p:cNvSpPr>
+          <p:nvPr/>
+        </p:nvSpPr>
+        <p:spPr>
+          <a:xfrm>
+            <a:off x="2428875" y="4857750"/>
+            <a:ext cx="2057400" cy="238125"/>
+          </a:xfrm>
+          <a:prstGeom prst="parallelogram">
+            <a:avLst/>
+          </a:prstGeom>
+          <a:solidFill>
+            <a:srgbClr val="FFFFFF"/>
+          </a:solidFill>
+          <a:ln w="10001">
+            <a:solidFill>
+              <a:srgbClr val="2F73B7"/>
+            </a:solidFill>
+            <a:prstDash val="solid"/>
+          </a:ln>
+        </p:spPr>
+        <p:txBody>
+          <a:bodyPr wrap="none" lIns="76200" tIns="0" rIns="76200" bIns="0" anchor="ctr">
+            <a:normAutofit/>
+          </a:bodyPr>
+          <a:lstStyle/>
+          <a:p>
+            <a:pPr algn="ctr">
+              <a:buNone/>
+              <a:defRPr sz="998" b="1">
+                <a:solidFill>
+                  <a:srgbClr val="2F73B7"/>
+                </a:solidFill>
+                <a:latin typeface="Noto Sans CJK JP"/>
+                <a:ea typeface="Noto Sans CJK JP"/>
+                <a:cs typeface="Noto Sans CJK JP"/>
+              </a:defRPr>
+            </a:pPr>
+            <a:r>
+              <a:rPr sz="998" b="1">
+                <a:solidFill>
+                  <a:srgbClr val="2F73B7"/>
+                </a:solidFill>
+                <a:latin typeface="Noto Sans CJK JP"/>
+                <a:ea typeface="Noto Sans CJK JP"/>
+                <a:cs typeface="Noto Sans CJK JP"/>
+              </a:rPr>
+              <a:t>2 数理理論</a:t>
+            </a:r>
+          </a:p>
+        </p:txBody>
+      </p:sp>
+      <p:sp>
+        <p:nvSpPr>
+          <p:cNvPr id="15" name="chapter-tab-3">
+            <a:extLst>
+              <a:ext uri="{FF2B5EF4-FFF2-40B4-BE49-F238E27FC236}">
+                <a16:creationId xmlns:a16="http://schemas.microsoft.com/office/drawing/2014/main" id="{90179555-EBDB-BC91-D7C9-8701522CFEB3}"/>
+              </a:ext>
+            </a:extLst>
+          </p:cNvPr>
+          <p:cNvSpPr>
+            <a:spLocks noGrp="1"/>
+          </p:cNvSpPr>
+          <p:nvPr/>
+        </p:nvSpPr>
+        <p:spPr>
+          <a:xfrm>
+            <a:off x="4400550" y="4857750"/>
+            <a:ext cx="2057400" cy="238125"/>
+          </a:xfrm>
+          <a:prstGeom prst="parallelogram">
+            <a:avLst/>
+          </a:prstGeom>
+          <a:solidFill>
+            <a:srgbClr val="2A8F6A"/>
+          </a:solidFill>
+          <a:ln w="11430">
+            <a:solidFill>
+              <a:srgbClr val="2A8F6A"/>
+            </a:solidFill>
+            <a:prstDash val="solid"/>
+          </a:ln>
+        </p:spPr>
+        <p:txBody>
+          <a:bodyPr wrap="none" lIns="76200" tIns="0" rIns="76200" bIns="0" anchor="ctr">
+            <a:normAutofit/>
+          </a:bodyPr>
+          <a:lstStyle/>
+          <a:p>
+            <a:pPr algn="ctr">
+              <a:buNone/>
+              <a:defRPr sz="998" b="1">
+                <a:solidFill>
+                  <a:srgbClr val="FFFFFF"/>
+                </a:solidFill>
+                <a:latin typeface="Noto Sans CJK JP"/>
+                <a:ea typeface="Noto Sans CJK JP"/>
+                <a:cs typeface="Noto Sans CJK JP"/>
+              </a:defRPr>
+            </a:pPr>
+            <a:r>
+              <a:rPr sz="998" b="1">
+                <a:solidFill>
+                  <a:srgbClr val="FFFFFF"/>
+                </a:solidFill>
+                <a:latin typeface="Noto Sans CJK JP"/>
+                <a:ea typeface="Noto Sans CJK JP"/>
+                <a:cs typeface="Noto Sans CJK JP"/>
+              </a:rPr>
+              <a:t>3 シミュレーション</a:t>
+            </a:r>
+          </a:p>
+        </p:txBody>
+      </p:sp>
+      <p:sp>
+        <p:nvSpPr>
+          <p:cNvPr id="17" name="chapter-tab-4">
+            <a:extLst>
+              <a:ext uri="{FF2B5EF4-FFF2-40B4-BE49-F238E27FC236}">
+                <a16:creationId xmlns:a16="http://schemas.microsoft.com/office/drawing/2014/main" id="{DE6DCB3A-D7F9-9AAC-8E5B-4DEFDE4C9125}"/>
+              </a:ext>
+            </a:extLst>
+          </p:cNvPr>
+          <p:cNvSpPr>
+            <a:spLocks noGrp="1"/>
+          </p:cNvSpPr>
+          <p:nvPr/>
+        </p:nvSpPr>
+        <p:spPr>
+          <a:xfrm>
+            <a:off x="6372225" y="4857750"/>
+            <a:ext cx="2057400" cy="238125"/>
+          </a:xfrm>
+          <a:prstGeom prst="parallelogram">
+            <a:avLst/>
+          </a:prstGeom>
+          <a:solidFill>
+            <a:srgbClr val="FFFFFF"/>
+          </a:solidFill>
+          <a:ln w="10001">
+            <a:solidFill>
+              <a:srgbClr val="C9534B"/>
+            </a:solidFill>
+            <a:prstDash val="solid"/>
+          </a:ln>
+        </p:spPr>
+        <p:txBody>
+          <a:bodyPr wrap="none" lIns="76200" tIns="0" rIns="76200" bIns="0" anchor="ctr">
+            <a:normAutofit/>
+          </a:bodyPr>
+          <a:lstStyle/>
+          <a:p>
+            <a:pPr algn="ctr">
+              <a:buNone/>
+              <a:defRPr sz="998" b="1">
+                <a:solidFill>
+                  <a:srgbClr val="C9534B"/>
+                </a:solidFill>
+                <a:latin typeface="Noto Sans CJK JP"/>
+                <a:ea typeface="Noto Sans CJK JP"/>
+                <a:cs typeface="Noto Sans CJK JP"/>
+              </a:defRPr>
+            </a:pPr>
+            <a:r>
+              <a:rPr sz="998" b="1">
+                <a:solidFill>
+                  <a:srgbClr val="C9534B"/>
+                </a:solidFill>
+                <a:latin typeface="Noto Sans CJK JP"/>
+                <a:ea typeface="Noto Sans CJK JP"/>
+                <a:cs typeface="Noto Sans CJK JP"/>
+              </a:rPr>
+              <a:t>4 結論</a:t>
+            </a:r>
+          </a:p>
+        </p:txBody>
+      </p:sp>
+      <p:sp>
+        <p:nvSpPr>
+          <p:cNvPr id="5" name="s10-call-line-2">
+            <a:extLst>
+              <a:ext uri="{FF2B5EF4-FFF2-40B4-BE49-F238E27FC236}">
+                <a16:creationId xmlns:a16="http://schemas.microsoft.com/office/drawing/2014/main" id="{9F0695B5-4CF1-2760-63F6-DBA3F6C398DB}"/>
+              </a:ext>
+            </a:extLst>
+          </p:cNvPr>
+          <p:cNvSpPr>
+            <a:spLocks noGrp="1"/>
+          </p:cNvSpPr>
+          <p:nvPr/>
+        </p:nvSpPr>
+        <p:spPr>
+          <a:xfrm>
+            <a:off x="5216747" y="3414319"/>
+            <a:ext cx="1080000" cy="9525"/>
+          </a:xfrm>
+          <a:prstGeom prst="rect">
+            <a:avLst/>
+          </a:prstGeom>
+          <a:solidFill>
+            <a:srgbClr val="D94138"/>
+          </a:solidFill>
+          <a:ln w="0">
+            <a:noFill/>
+            <a:prstDash val="solid"/>
+          </a:ln>
+        </p:spPr>
+      </p:sp>
+      <p:sp>
+        <p:nvSpPr>
+          <p:cNvPr id="7" name="s10-call-code-2">
+            <a:extLst>
+              <a:ext uri="{FF2B5EF4-FFF2-40B4-BE49-F238E27FC236}">
+                <a16:creationId xmlns:a16="http://schemas.microsoft.com/office/drawing/2014/main" id="{4479CA77-5C70-EBB9-06FC-B0749DB4E8ED}"/>
+              </a:ext>
+            </a:extLst>
+          </p:cNvPr>
+          <p:cNvSpPr>
+            <a:spLocks noGrp="1"/>
+          </p:cNvSpPr>
+          <p:nvPr/>
+        </p:nvSpPr>
+        <p:spPr>
+          <a:xfrm>
+            <a:off x="6377222" y="3309797"/>
+            <a:ext cx="1143000" cy="219075"/>
+          </a:xfrm>
+          <a:prstGeom prst="rect">
+            <a:avLst/>
+          </a:prstGeom>
+          <a:noFill/>
+          <a:ln w="0">
+            <a:noFill/>
+            <a:prstDash val="solid"/>
+          </a:ln>
+        </p:spPr>
+        <p:txBody>
+          <a:bodyPr wrap="square" lIns="0" tIns="0" rIns="0" bIns="0" anchor="ctr">
+            <a:normAutofit/>
+          </a:bodyPr>
+          <a:lstStyle/>
+          <a:p>
+            <a:pPr algn="l">
+              <a:defRPr sz="1200" b="1">
+                <a:solidFill>
+                  <a:srgbClr val="D94138"/>
+                </a:solidFill>
+                <a:latin typeface="Arial"/>
+                <a:ea typeface="Arial"/>
+                <a:cs typeface="Arial"/>
+              </a:defRPr>
+            </a:pPr>
+            <a:r>
+              <a:rPr sz="1200" b="1" dirty="0" err="1">
+                <a:solidFill>
+                  <a:srgbClr val="D94138"/>
+                </a:solidFill>
+                <a:latin typeface="Arial"/>
+                <a:ea typeface="Arial"/>
+                <a:cs typeface="Arial"/>
+              </a:rPr>
+              <a:t>dTCMV</a:t>
+            </a:r>
+            <a:endParaRPr sz="1200" b="1" dirty="0">
+              <a:solidFill>
+                <a:srgbClr val="D94138"/>
+              </a:solidFill>
+              <a:latin typeface="Arial"/>
+              <a:ea typeface="Arial"/>
+              <a:cs typeface="Arial"/>
+            </a:endParaRPr>
+          </a:p>
+        </p:txBody>
+      </p:sp>
+      <p:sp>
+        <p:nvSpPr>
+          <p:cNvPr id="8" name="s10-call-text-2">
+            <a:extLst>
+              <a:ext uri="{FF2B5EF4-FFF2-40B4-BE49-F238E27FC236}">
+                <a16:creationId xmlns:a16="http://schemas.microsoft.com/office/drawing/2014/main" id="{4E003B3E-D5EE-AA67-2DCA-8B08C7E17971}"/>
+              </a:ext>
+            </a:extLst>
+          </p:cNvPr>
+          <p:cNvSpPr>
+            <a:spLocks noGrp="1"/>
+          </p:cNvSpPr>
+          <p:nvPr/>
+        </p:nvSpPr>
+        <p:spPr>
+          <a:xfrm>
+            <a:off x="6377222" y="3547922"/>
+            <a:ext cx="2129620" cy="361950"/>
+          </a:xfrm>
+          <a:prstGeom prst="rect">
+            <a:avLst/>
+          </a:prstGeom>
+          <a:noFill/>
+          <a:ln w="0">
+            <a:noFill/>
+            <a:prstDash val="solid"/>
+          </a:ln>
+        </p:spPr>
+        <p:txBody>
+          <a:bodyPr wrap="square" lIns="0" tIns="0" rIns="0" bIns="0" anchor="ctr">
+            <a:normAutofit/>
+          </a:bodyPr>
+          <a:lstStyle/>
+          <a:p>
+            <a:pPr algn="l">
+              <a:defRPr sz="923" b="0">
+                <a:solidFill>
+                  <a:srgbClr val="111827"/>
+                </a:solidFill>
+                <a:latin typeface="Noto Sans CJK JP"/>
+                <a:ea typeface="Noto Sans CJK JP"/>
+                <a:cs typeface="Noto Sans CJK JP"/>
+              </a:defRPr>
+            </a:pPr>
+            <a:r>
+              <a:rPr lang="ja-JP" altLang="en-US" sz="923" b="0" dirty="0">
+                <a:solidFill>
+                  <a:srgbClr val="111827"/>
+                </a:solidFill>
+                <a:latin typeface="Noto Sans CJK JP"/>
+                <a:ea typeface="Noto Sans CJK JP"/>
+                <a:cs typeface="Noto Sans CJK JP"/>
+              </a:rPr>
+              <a:t>総資産に基づくので、</a:t>
+            </a:r>
+            <a:r>
+              <a:rPr lang="en-US" altLang="ja-JP" sz="923" b="0" dirty="0">
+                <a:solidFill>
+                  <a:srgbClr val="111827"/>
+                </a:solidFill>
+                <a:latin typeface="Noto Sans CJK JP"/>
+                <a:ea typeface="Noto Sans CJK JP"/>
+                <a:cs typeface="Noto Sans CJK JP"/>
+              </a:rPr>
+              <a:t>D</a:t>
+            </a:r>
+            <a:r>
+              <a:rPr lang="en-US" altLang="ja-JP" sz="923" dirty="0">
+                <a:solidFill>
+                  <a:srgbClr val="111827"/>
+                </a:solidFill>
+                <a:latin typeface="Noto Sans CJK JP"/>
+                <a:ea typeface="Noto Sans CJK JP"/>
+                <a:cs typeface="Noto Sans CJK JP"/>
+              </a:rPr>
+              <a:t>&gt;0</a:t>
+            </a:r>
+            <a:r>
+              <a:rPr lang="ja-JP" altLang="en-US" sz="923" dirty="0">
+                <a:solidFill>
+                  <a:srgbClr val="111827"/>
+                </a:solidFill>
+                <a:latin typeface="Noto Sans CJK JP"/>
+                <a:ea typeface="Noto Sans CJK JP"/>
+                <a:cs typeface="Noto Sans CJK JP"/>
+              </a:rPr>
+              <a:t>のとき、</a:t>
+            </a:r>
+            <a:endParaRPr lang="en-US" altLang="ja-JP" sz="923" dirty="0">
+              <a:solidFill>
+                <a:srgbClr val="111827"/>
+              </a:solidFill>
+              <a:latin typeface="Noto Sans CJK JP"/>
+              <a:ea typeface="Noto Sans CJK JP"/>
+              <a:cs typeface="Noto Sans CJK JP"/>
+            </a:endParaRPr>
+          </a:p>
+          <a:p>
+            <a:pPr algn="l">
+              <a:defRPr sz="923" b="0">
+                <a:solidFill>
+                  <a:srgbClr val="111827"/>
+                </a:solidFill>
+                <a:latin typeface="Noto Sans CJK JP"/>
+                <a:ea typeface="Noto Sans CJK JP"/>
+                <a:cs typeface="Noto Sans CJK JP"/>
+              </a:defRPr>
+            </a:pPr>
+            <a:r>
+              <a:rPr lang="ja-JP" altLang="en-US" sz="923" b="1" dirty="0">
+                <a:solidFill>
+                  <a:srgbClr val="111827"/>
+                </a:solidFill>
+                <a:latin typeface="Noto Sans CJK JP"/>
+                <a:ea typeface="Noto Sans CJK JP"/>
+                <a:cs typeface="Noto Sans CJK JP"/>
+              </a:rPr>
+              <a:t>リスク許容度が増加</a:t>
+            </a:r>
+            <a:endParaRPr sz="923" b="1" dirty="0">
+              <a:solidFill>
+                <a:srgbClr val="111827"/>
+              </a:solidFill>
+              <a:latin typeface="Noto Sans CJK JP"/>
+              <a:ea typeface="Noto Sans CJK JP"/>
+              <a:cs typeface="Noto Sans CJK JP"/>
+            </a:endParaRPr>
+          </a:p>
+        </p:txBody>
+      </p:sp>
+      <p:cxnSp>
+        <p:nvCxnSpPr>
+          <p:cNvPr id="9" name="直線コネクタ 8">
+            <a:extLst>
+              <a:ext uri="{FF2B5EF4-FFF2-40B4-BE49-F238E27FC236}">
+                <a16:creationId xmlns:a16="http://schemas.microsoft.com/office/drawing/2014/main" id="{4B22233B-4887-070E-193D-E3F9DBEA7F52}"/>
+              </a:ext>
+            </a:extLst>
+          </p:cNvPr>
+          <p:cNvCxnSpPr>
+            <a:cxnSpLocks/>
+          </p:cNvCxnSpPr>
+          <p:nvPr/>
+        </p:nvCxnSpPr>
+        <p:spPr>
+          <a:xfrm>
+            <a:off x="4100747" y="3414321"/>
+            <a:ext cx="1116000" cy="0"/>
+          </a:xfrm>
+          <a:prstGeom prst="line">
+            <a:avLst/>
+          </a:prstGeom>
+          <a:ln>
+            <a:solidFill>
+              <a:srgbClr val="D94138"/>
+            </a:solidFill>
+            <a:prstDash val="dash"/>
+          </a:ln>
+        </p:spPr>
+        <p:style>
+          <a:lnRef idx="1">
+            <a:schemeClr val="accent1"/>
+          </a:lnRef>
+          <a:fillRef idx="0">
+            <a:schemeClr val="accent1"/>
+          </a:fillRef>
+          <a:effectRef idx="0">
+            <a:schemeClr val="accent1"/>
+          </a:effectRef>
+          <a:fontRef idx="minor">
+            <a:schemeClr val="tx1"/>
+          </a:fontRef>
+        </p:style>
+      </p:cxnSp>
+      <p:sp>
+        <p:nvSpPr>
+          <p:cNvPr id="11" name="s10-call-dot-2">
+            <a:extLst>
+              <a:ext uri="{FF2B5EF4-FFF2-40B4-BE49-F238E27FC236}">
+                <a16:creationId xmlns:a16="http://schemas.microsoft.com/office/drawing/2014/main" id="{0B101CB4-31D6-5138-10F6-BF8D3D9F5B6B}"/>
+              </a:ext>
+            </a:extLst>
+          </p:cNvPr>
+          <p:cNvSpPr>
+            <a:spLocks noGrp="1"/>
+          </p:cNvSpPr>
+          <p:nvPr/>
+        </p:nvSpPr>
+        <p:spPr>
+          <a:xfrm>
+            <a:off x="4005497" y="3371402"/>
+            <a:ext cx="95250" cy="95250"/>
+          </a:xfrm>
+          <a:prstGeom prst="ellipse">
+            <a:avLst/>
+          </a:prstGeom>
+          <a:solidFill>
+            <a:srgbClr val="D94138"/>
+          </a:solidFill>
+          <a:ln w="0">
+            <a:noFill/>
+            <a:prstDash val="solid"/>
+          </a:ln>
+        </p:spPr>
+      </p:sp>
+    </p:spTree>
+    <p:extLst>
+      <p:ext uri="{BB962C8B-B14F-4D97-AF65-F5344CB8AC3E}">
+        <p14:creationId xmlns:p14="http://schemas.microsoft.com/office/powerpoint/2010/main" val="191220438"/>
       </p:ext>
     </p:extLst>
   </p:cSld>
@@ -27684,12 +27459,12 @@
                               <a:ea typeface="Cambria Math" panose="02040503050406030204" pitchFamily="18" charset="0"/>
                               <a:cs typeface="Noto Sans CJK JP"/>
                             </a:rPr>
-                            <m:t>𝑹</m:t>
+                            <m:t>𝒓</m:t>
                           </m:r>
                         </m:e>
                         <m:sub>
                           <m:r>
-                            <a:rPr lang="en-US" altLang="ja-JP" sz="1388" b="1" i="1" smtClean="0">
+                            <a:rPr lang="en-US" altLang="ja-JP" sz="1388" b="1" i="1">
                               <a:solidFill>
                                 <a:srgbClr val="07183B"/>
                               </a:solidFill>
@@ -27804,7 +27579,7 @@
               <a:blipFill>
                 <a:blip r:embed="rId8"/>
                 <a:stretch>
-                  <a:fillRect l="-467" r="-4206"/>
+                  <a:fillRect r="-3271"/>
                 </a:stretch>
               </a:blipFill>
               <a:ln w="0">
@@ -34491,2108 +34266,6 @@
           <a:p>
             <a:pPr algn="l">
               <a:buNone/>
-              <a:defRPr sz="2138" b="1">
-                <a:solidFill>
-                  <a:srgbClr val="111827"/>
-                </a:solidFill>
-                <a:latin typeface="Noto Sans CJK JP"/>
-                <a:ea typeface="Noto Sans CJK JP"/>
-                <a:cs typeface="Noto Sans CJK JP"/>
-              </a:defRPr>
-            </a:pPr>
-            <a:r>
-              <a:rPr sz="2138" b="1" dirty="0" err="1">
-                <a:solidFill>
-                  <a:srgbClr val="111827"/>
-                </a:solidFill>
-                <a:latin typeface="Noto Sans CJK JP"/>
-                <a:ea typeface="Noto Sans CJK JP"/>
-                <a:cs typeface="Noto Sans CJK JP"/>
-              </a:rPr>
-              <a:t>本研究が確立した範囲と、今後の</a:t>
-            </a:r>
-            <a:r>
-              <a:rPr lang="ja-JP" altLang="en-US" sz="2138" b="1" dirty="0">
-                <a:solidFill>
-                  <a:srgbClr val="111827"/>
-                </a:solidFill>
-                <a:latin typeface="Noto Sans CJK JP"/>
-                <a:ea typeface="Noto Sans CJK JP"/>
-                <a:cs typeface="Noto Sans CJK JP"/>
-              </a:rPr>
-              <a:t>研究</a:t>
-            </a:r>
-            <a:r>
-              <a:rPr sz="2138" b="1" dirty="0" err="1">
-                <a:solidFill>
-                  <a:srgbClr val="111827"/>
-                </a:solidFill>
-                <a:latin typeface="Noto Sans CJK JP"/>
-                <a:ea typeface="Noto Sans CJK JP"/>
-                <a:cs typeface="Noto Sans CJK JP"/>
-              </a:rPr>
-              <a:t>課題</a:t>
-            </a:r>
-            <a:endParaRPr sz="2138" b="1" dirty="0">
-              <a:solidFill>
-                <a:srgbClr val="111827"/>
-              </a:solidFill>
-              <a:latin typeface="Noto Sans CJK JP"/>
-              <a:ea typeface="Noto Sans CJK JP"/>
-              <a:cs typeface="Noto Sans CJK JP"/>
-            </a:endParaRPr>
-          </a:p>
-        </p:txBody>
-      </p:sp>
-      <p:sp>
-        <p:nvSpPr>
-          <p:cNvPr id="3" name="title-divider">
-            <a:extLst>
-              <a:ext uri="{FF2B5EF4-FFF2-40B4-BE49-F238E27FC236}">
-                <a16:creationId xmlns:a16="http://schemas.microsoft.com/office/drawing/2014/main" id="{499BA774-9656-4F84-8716-C028B7E6A506}"/>
-              </a:ext>
-            </a:extLst>
-          </p:cNvPr>
-          <p:cNvSpPr>
-            <a:spLocks noGrp="1"/>
-          </p:cNvSpPr>
-          <p:nvPr/>
-        </p:nvSpPr>
-        <p:spPr>
-          <a:xfrm>
-            <a:off x="457200" y="1676400"/>
-            <a:ext cx="8229600" cy="9525"/>
-          </a:xfrm>
-          <a:prstGeom prst="rect">
-            <a:avLst/>
-          </a:prstGeom>
-          <a:solidFill>
-            <a:srgbClr val="E5EAF0"/>
-          </a:solidFill>
-          <a:ln w="0">
-            <a:noFill/>
-            <a:prstDash val="solid"/>
-          </a:ln>
-        </p:spPr>
-      </p:sp>
-      <p:sp>
-        <p:nvSpPr>
-          <p:cNvPr id="4" name="title-accent">
-            <a:extLst>
-              <a:ext uri="{FF2B5EF4-FFF2-40B4-BE49-F238E27FC236}">
-                <a16:creationId xmlns:a16="http://schemas.microsoft.com/office/drawing/2014/main" id="{0FF6C9CC-2AE2-4FC7-A300-9387C918EF3F}"/>
-              </a:ext>
-            </a:extLst>
-          </p:cNvPr>
-          <p:cNvSpPr>
-            <a:spLocks noGrp="1"/>
-          </p:cNvSpPr>
-          <p:nvPr/>
-        </p:nvSpPr>
-        <p:spPr>
-          <a:xfrm>
-            <a:off x="457200" y="1666875"/>
-            <a:ext cx="552450" cy="38100"/>
-          </a:xfrm>
-          <a:prstGeom prst="rect">
-            <a:avLst/>
-          </a:prstGeom>
-          <a:solidFill>
-            <a:srgbClr val="4A90E2"/>
-          </a:solidFill>
-          <a:ln w="0">
-            <a:noFill/>
-            <a:prstDash val="solid"/>
-          </a:ln>
-        </p:spPr>
-      </p:sp>
-      <p:sp>
-        <p:nvSpPr>
-          <p:cNvPr id="13" name="chapter-tab-1">
-            <a:extLst>
-              <a:ext uri="{FF2B5EF4-FFF2-40B4-BE49-F238E27FC236}">
-                <a16:creationId xmlns:a16="http://schemas.microsoft.com/office/drawing/2014/main" id="{6308742C-122C-466C-BBFB-98211169AD48}"/>
-              </a:ext>
-            </a:extLst>
-          </p:cNvPr>
-          <p:cNvSpPr>
-            <a:spLocks noGrp="1"/>
-          </p:cNvSpPr>
-          <p:nvPr/>
-        </p:nvSpPr>
-        <p:spPr>
-          <a:xfrm>
-            <a:off x="457200" y="4857750"/>
-            <a:ext cx="2057400" cy="238125"/>
-          </a:xfrm>
-          <a:prstGeom prst="parallelogram">
-            <a:avLst/>
-          </a:prstGeom>
-          <a:solidFill>
-            <a:srgbClr val="FFFFFF"/>
-          </a:solidFill>
-          <a:ln w="10001">
-            <a:solidFill>
-              <a:srgbClr val="4A90E2"/>
-            </a:solidFill>
-            <a:prstDash val="solid"/>
-          </a:ln>
-        </p:spPr>
-        <p:txBody>
-          <a:bodyPr wrap="none" lIns="76200" tIns="0" rIns="76200" bIns="0" anchor="ctr">
-            <a:normAutofit/>
-          </a:bodyPr>
-          <a:lstStyle/>
-          <a:p>
-            <a:pPr algn="ctr">
-              <a:buNone/>
-              <a:defRPr sz="998" b="1">
-                <a:solidFill>
-                  <a:srgbClr val="4A90E2"/>
-                </a:solidFill>
-                <a:latin typeface="Noto Sans CJK JP"/>
-                <a:ea typeface="Noto Sans CJK JP"/>
-                <a:cs typeface="Noto Sans CJK JP"/>
-              </a:defRPr>
-            </a:pPr>
-            <a:r>
-              <a:rPr sz="998" b="1">
-                <a:solidFill>
-                  <a:srgbClr val="4A90E2"/>
-                </a:solidFill>
-                <a:latin typeface="Noto Sans CJK JP"/>
-                <a:ea typeface="Noto Sans CJK JP"/>
-                <a:cs typeface="Noto Sans CJK JP"/>
-              </a:rPr>
-              <a:t>1 前提</a:t>
-            </a:r>
-          </a:p>
-        </p:txBody>
-      </p:sp>
-      <p:sp>
-        <p:nvSpPr>
-          <p:cNvPr id="14" name="chapter-tab-2">
-            <a:extLst>
-              <a:ext uri="{FF2B5EF4-FFF2-40B4-BE49-F238E27FC236}">
-                <a16:creationId xmlns:a16="http://schemas.microsoft.com/office/drawing/2014/main" id="{5E3409C5-46A1-40CA-9E2A-CCBB6EC48667}"/>
-              </a:ext>
-            </a:extLst>
-          </p:cNvPr>
-          <p:cNvSpPr>
-            <a:spLocks noGrp="1"/>
-          </p:cNvSpPr>
-          <p:nvPr/>
-        </p:nvSpPr>
-        <p:spPr>
-          <a:xfrm>
-            <a:off x="2428875" y="4857750"/>
-            <a:ext cx="2057400" cy="238125"/>
-          </a:xfrm>
-          <a:prstGeom prst="parallelogram">
-            <a:avLst/>
-          </a:prstGeom>
-          <a:solidFill>
-            <a:srgbClr val="FFFFFF"/>
-          </a:solidFill>
-          <a:ln w="10001">
-            <a:solidFill>
-              <a:srgbClr val="2F73B7"/>
-            </a:solidFill>
-            <a:prstDash val="solid"/>
-          </a:ln>
-        </p:spPr>
-        <p:txBody>
-          <a:bodyPr wrap="none" lIns="76200" tIns="0" rIns="76200" bIns="0" anchor="ctr">
-            <a:normAutofit/>
-          </a:bodyPr>
-          <a:lstStyle/>
-          <a:p>
-            <a:pPr algn="ctr">
-              <a:buNone/>
-              <a:defRPr sz="998" b="1">
-                <a:solidFill>
-                  <a:srgbClr val="2F73B7"/>
-                </a:solidFill>
-                <a:latin typeface="Noto Sans CJK JP"/>
-                <a:ea typeface="Noto Sans CJK JP"/>
-                <a:cs typeface="Noto Sans CJK JP"/>
-              </a:defRPr>
-            </a:pPr>
-            <a:r>
-              <a:rPr sz="998" b="1">
-                <a:solidFill>
-                  <a:srgbClr val="2F73B7"/>
-                </a:solidFill>
-                <a:latin typeface="Noto Sans CJK JP"/>
-                <a:ea typeface="Noto Sans CJK JP"/>
-                <a:cs typeface="Noto Sans CJK JP"/>
-              </a:rPr>
-              <a:t>2 数理理論</a:t>
-            </a:r>
-          </a:p>
-        </p:txBody>
-      </p:sp>
-      <p:sp>
-        <p:nvSpPr>
-          <p:cNvPr id="15" name="chapter-tab-3">
-            <a:extLst>
-              <a:ext uri="{FF2B5EF4-FFF2-40B4-BE49-F238E27FC236}">
-                <a16:creationId xmlns:a16="http://schemas.microsoft.com/office/drawing/2014/main" id="{9F5EBCBB-5BFF-42B1-B174-B95A0DBABDF8}"/>
-              </a:ext>
-            </a:extLst>
-          </p:cNvPr>
-          <p:cNvSpPr>
-            <a:spLocks noGrp="1"/>
-          </p:cNvSpPr>
-          <p:nvPr/>
-        </p:nvSpPr>
-        <p:spPr>
-          <a:xfrm>
-            <a:off x="4400550" y="4857750"/>
-            <a:ext cx="2057400" cy="238125"/>
-          </a:xfrm>
-          <a:prstGeom prst="parallelogram">
-            <a:avLst/>
-          </a:prstGeom>
-          <a:solidFill>
-            <a:srgbClr val="FFFFFF"/>
-          </a:solidFill>
-          <a:ln w="10001">
-            <a:solidFill>
-              <a:srgbClr val="2A8F6A"/>
-            </a:solidFill>
-            <a:prstDash val="solid"/>
-          </a:ln>
-        </p:spPr>
-        <p:txBody>
-          <a:bodyPr wrap="none" lIns="76200" tIns="0" rIns="76200" bIns="0" anchor="ctr">
-            <a:normAutofit/>
-          </a:bodyPr>
-          <a:lstStyle/>
-          <a:p>
-            <a:pPr algn="ctr">
-              <a:buNone/>
-              <a:defRPr sz="998" b="1">
-                <a:solidFill>
-                  <a:srgbClr val="2A8F6A"/>
-                </a:solidFill>
-                <a:latin typeface="Noto Sans CJK JP"/>
-                <a:ea typeface="Noto Sans CJK JP"/>
-                <a:cs typeface="Noto Sans CJK JP"/>
-              </a:defRPr>
-            </a:pPr>
-            <a:r>
-              <a:rPr sz="998" b="1">
-                <a:solidFill>
-                  <a:srgbClr val="2A8F6A"/>
-                </a:solidFill>
-                <a:latin typeface="Noto Sans CJK JP"/>
-                <a:ea typeface="Noto Sans CJK JP"/>
-                <a:cs typeface="Noto Sans CJK JP"/>
-              </a:rPr>
-              <a:t>3 シミュレーション</a:t>
-            </a:r>
-          </a:p>
-        </p:txBody>
-      </p:sp>
-      <p:sp>
-        <p:nvSpPr>
-          <p:cNvPr id="16" name="chapter-tab-4">
-            <a:extLst>
-              <a:ext uri="{FF2B5EF4-FFF2-40B4-BE49-F238E27FC236}">
-                <a16:creationId xmlns:a16="http://schemas.microsoft.com/office/drawing/2014/main" id="{2AF5611D-1F9A-4694-8355-F0D76A9B8096}"/>
-              </a:ext>
-            </a:extLst>
-          </p:cNvPr>
-          <p:cNvSpPr>
-            <a:spLocks noGrp="1"/>
-          </p:cNvSpPr>
-          <p:nvPr/>
-        </p:nvSpPr>
-        <p:spPr>
-          <a:xfrm>
-            <a:off x="6372225" y="4857750"/>
-            <a:ext cx="2057400" cy="238125"/>
-          </a:xfrm>
-          <a:prstGeom prst="parallelogram">
-            <a:avLst/>
-          </a:prstGeom>
-          <a:solidFill>
-            <a:srgbClr val="C9534B"/>
-          </a:solidFill>
-          <a:ln w="11430">
-            <a:solidFill>
-              <a:srgbClr val="C9534B"/>
-            </a:solidFill>
-            <a:prstDash val="solid"/>
-          </a:ln>
-        </p:spPr>
-        <p:txBody>
-          <a:bodyPr wrap="none" lIns="76200" tIns="0" rIns="76200" bIns="0" anchor="ctr">
-            <a:normAutofit/>
-          </a:bodyPr>
-          <a:lstStyle/>
-          <a:p>
-            <a:pPr algn="ctr">
-              <a:buNone/>
-              <a:defRPr sz="998" b="1">
-                <a:solidFill>
-                  <a:srgbClr val="FFFFFF"/>
-                </a:solidFill>
-                <a:latin typeface="Noto Sans CJK JP"/>
-                <a:ea typeface="Noto Sans CJK JP"/>
-                <a:cs typeface="Noto Sans CJK JP"/>
-              </a:defRPr>
-            </a:pPr>
-            <a:r>
-              <a:rPr sz="998" b="1">
-                <a:solidFill>
-                  <a:srgbClr val="FFFFFF"/>
-                </a:solidFill>
-                <a:latin typeface="Noto Sans CJK JP"/>
-                <a:ea typeface="Noto Sans CJK JP"/>
-                <a:cs typeface="Noto Sans CJK JP"/>
-              </a:rPr>
-              <a:t>4 結論</a:t>
-            </a:r>
-          </a:p>
-        </p:txBody>
-      </p:sp>
-      <p:sp>
-        <p:nvSpPr>
-          <p:cNvPr id="17" name="s17-left-head">
-            <a:extLst>
-              <a:ext uri="{FF2B5EF4-FFF2-40B4-BE49-F238E27FC236}">
-                <a16:creationId xmlns:a16="http://schemas.microsoft.com/office/drawing/2014/main" id="{D8C59788-AFF8-4F39-88C7-D94BDF86433D}"/>
-              </a:ext>
-            </a:extLst>
-          </p:cNvPr>
-          <p:cNvSpPr>
-            <a:spLocks noGrp="1"/>
-          </p:cNvSpPr>
-          <p:nvPr/>
-        </p:nvSpPr>
-        <p:spPr>
-          <a:xfrm>
-            <a:off x="666750" y="1790700"/>
-            <a:ext cx="3333750" cy="266700"/>
-          </a:xfrm>
-          <a:prstGeom prst="rect">
-            <a:avLst/>
-          </a:prstGeom>
-          <a:noFill/>
-          <a:ln w="0">
-            <a:noFill/>
-            <a:prstDash val="solid"/>
-          </a:ln>
-        </p:spPr>
-        <p:txBody>
-          <a:bodyPr wrap="square" lIns="0" tIns="0" rIns="0" bIns="0" anchor="ctr">
-            <a:normAutofit/>
-          </a:bodyPr>
-          <a:lstStyle/>
-          <a:p>
-            <a:pPr algn="l">
-              <a:defRPr sz="1500" b="1">
-                <a:solidFill>
-                  <a:srgbClr val="16875C"/>
-                </a:solidFill>
-                <a:latin typeface="Noto Sans CJK JP"/>
-                <a:ea typeface="Noto Sans CJK JP"/>
-                <a:cs typeface="Noto Sans CJK JP"/>
-              </a:defRPr>
-            </a:pPr>
-            <a:r>
-              <a:rPr sz="1500" b="1">
-                <a:solidFill>
-                  <a:srgbClr val="16875C"/>
-                </a:solidFill>
-                <a:latin typeface="Noto Sans CJK JP"/>
-                <a:ea typeface="Noto Sans CJK JP"/>
-                <a:cs typeface="Noto Sans CJK JP"/>
-              </a:rPr>
-              <a:t>確立した範囲</a:t>
-            </a:r>
-          </a:p>
-        </p:txBody>
-      </p:sp>
-      <p:sp>
-        <p:nvSpPr>
-          <p:cNvPr id="18" name="s17-left-rule">
-            <a:extLst>
-              <a:ext uri="{FF2B5EF4-FFF2-40B4-BE49-F238E27FC236}">
-                <a16:creationId xmlns:a16="http://schemas.microsoft.com/office/drawing/2014/main" id="{38915F1D-217E-4C45-A8F1-88BDCB1B0413}"/>
-              </a:ext>
-            </a:extLst>
-          </p:cNvPr>
-          <p:cNvSpPr>
-            <a:spLocks noGrp="1"/>
-          </p:cNvSpPr>
-          <p:nvPr/>
-        </p:nvSpPr>
-        <p:spPr>
-          <a:xfrm>
-            <a:off x="666750" y="2095500"/>
-            <a:ext cx="3524250" cy="14288"/>
-          </a:xfrm>
-          <a:prstGeom prst="rect">
-            <a:avLst/>
-          </a:prstGeom>
-          <a:solidFill>
-            <a:srgbClr val="16875C"/>
-          </a:solidFill>
-          <a:ln w="0">
-            <a:noFill/>
-            <a:prstDash val="solid"/>
-          </a:ln>
-        </p:spPr>
-      </p:sp>
-      <p:sp>
-        <p:nvSpPr>
-          <p:cNvPr id="19" name="s17-right-head">
-            <a:extLst>
-              <a:ext uri="{FF2B5EF4-FFF2-40B4-BE49-F238E27FC236}">
-                <a16:creationId xmlns:a16="http://schemas.microsoft.com/office/drawing/2014/main" id="{ED4538A4-3C19-4F4C-A5DA-756E244BDB81}"/>
-              </a:ext>
-            </a:extLst>
-          </p:cNvPr>
-          <p:cNvSpPr>
-            <a:spLocks noGrp="1"/>
-          </p:cNvSpPr>
-          <p:nvPr/>
-        </p:nvSpPr>
-        <p:spPr>
-          <a:xfrm>
-            <a:off x="4953000" y="1790700"/>
-            <a:ext cx="3333750" cy="266700"/>
-          </a:xfrm>
-          <a:prstGeom prst="rect">
-            <a:avLst/>
-          </a:prstGeom>
-          <a:noFill/>
-          <a:ln w="0">
-            <a:noFill/>
-            <a:prstDash val="solid"/>
-          </a:ln>
-        </p:spPr>
-        <p:txBody>
-          <a:bodyPr wrap="square" lIns="0" tIns="0" rIns="0" bIns="0" anchor="ctr">
-            <a:normAutofit/>
-          </a:bodyPr>
-          <a:lstStyle/>
-          <a:p>
-            <a:pPr algn="l">
-              <a:defRPr sz="1500" b="1">
-                <a:solidFill>
-                  <a:srgbClr val="D94138"/>
-                </a:solidFill>
-                <a:latin typeface="Noto Sans CJK JP"/>
-                <a:ea typeface="Noto Sans CJK JP"/>
-                <a:cs typeface="Noto Sans CJK JP"/>
-              </a:defRPr>
-            </a:pPr>
-            <a:r>
-              <a:rPr sz="1500" b="1" dirty="0" err="1">
-                <a:solidFill>
-                  <a:srgbClr val="D94138"/>
-                </a:solidFill>
-                <a:latin typeface="Noto Sans CJK JP"/>
-                <a:ea typeface="Noto Sans CJK JP"/>
-                <a:cs typeface="Noto Sans CJK JP"/>
-              </a:rPr>
-              <a:t>今後の</a:t>
-            </a:r>
-            <a:r>
-              <a:rPr lang="ja-JP" altLang="en-US" sz="1500" b="1" dirty="0">
-                <a:solidFill>
-                  <a:srgbClr val="D94138"/>
-                </a:solidFill>
-                <a:latin typeface="Noto Sans CJK JP"/>
-                <a:ea typeface="Noto Sans CJK JP"/>
-                <a:cs typeface="Noto Sans CJK JP"/>
-              </a:rPr>
-              <a:t>研究</a:t>
-            </a:r>
-            <a:r>
-              <a:rPr sz="1500" b="1" dirty="0" err="1">
-                <a:solidFill>
-                  <a:srgbClr val="D94138"/>
-                </a:solidFill>
-                <a:latin typeface="Noto Sans CJK JP"/>
-                <a:ea typeface="Noto Sans CJK JP"/>
-                <a:cs typeface="Noto Sans CJK JP"/>
-              </a:rPr>
-              <a:t>課題</a:t>
-            </a:r>
-            <a:endParaRPr sz="1500" b="1" dirty="0">
-              <a:solidFill>
-                <a:srgbClr val="D94138"/>
-              </a:solidFill>
-              <a:latin typeface="Noto Sans CJK JP"/>
-              <a:ea typeface="Noto Sans CJK JP"/>
-              <a:cs typeface="Noto Sans CJK JP"/>
-            </a:endParaRPr>
-          </a:p>
-        </p:txBody>
-      </p:sp>
-      <p:sp>
-        <p:nvSpPr>
-          <p:cNvPr id="20" name="s17-right-rule">
-            <a:extLst>
-              <a:ext uri="{FF2B5EF4-FFF2-40B4-BE49-F238E27FC236}">
-                <a16:creationId xmlns:a16="http://schemas.microsoft.com/office/drawing/2014/main" id="{E4A71D0B-2DF5-4770-8A2E-962BF336CD32}"/>
-              </a:ext>
-            </a:extLst>
-          </p:cNvPr>
-          <p:cNvSpPr>
-            <a:spLocks noGrp="1"/>
-          </p:cNvSpPr>
-          <p:nvPr/>
-        </p:nvSpPr>
-        <p:spPr>
-          <a:xfrm>
-            <a:off x="4953000" y="2095500"/>
-            <a:ext cx="3524250" cy="14288"/>
-          </a:xfrm>
-          <a:prstGeom prst="rect">
-            <a:avLst/>
-          </a:prstGeom>
-          <a:solidFill>
-            <a:srgbClr val="D94138"/>
-          </a:solidFill>
-          <a:ln w="0">
-            <a:noFill/>
-            <a:prstDash val="solid"/>
-          </a:ln>
-        </p:spPr>
-      </p:sp>
-      <p:sp>
-        <p:nvSpPr>
-          <p:cNvPr id="21" name="s17-divider">
-            <a:extLst>
-              <a:ext uri="{FF2B5EF4-FFF2-40B4-BE49-F238E27FC236}">
-                <a16:creationId xmlns:a16="http://schemas.microsoft.com/office/drawing/2014/main" id="{F16C264F-0156-4AB8-BF4B-78FF8E8FCE5B}"/>
-              </a:ext>
-            </a:extLst>
-          </p:cNvPr>
-          <p:cNvSpPr>
-            <a:spLocks noGrp="1"/>
-          </p:cNvSpPr>
-          <p:nvPr/>
-        </p:nvSpPr>
-        <p:spPr>
-          <a:xfrm>
-            <a:off x="4572000" y="1781175"/>
-            <a:ext cx="11430" cy="2362200"/>
-          </a:xfrm>
-          <a:prstGeom prst="rect">
-            <a:avLst/>
-          </a:prstGeom>
-          <a:solidFill>
-            <a:srgbClr val="DDE4EC"/>
-          </a:solidFill>
-          <a:ln w="0">
-            <a:noFill/>
-            <a:prstDash val="solid"/>
-          </a:ln>
-        </p:spPr>
-      </p:sp>
-      <p:sp>
-        <p:nvSpPr>
-          <p:cNvPr id="22" name="s17-left-dot-0">
-            <a:extLst>
-              <a:ext uri="{FF2B5EF4-FFF2-40B4-BE49-F238E27FC236}">
-                <a16:creationId xmlns:a16="http://schemas.microsoft.com/office/drawing/2014/main" id="{FEC8E76F-420C-4AFC-8E9B-4273EB309B2F}"/>
-              </a:ext>
-            </a:extLst>
-          </p:cNvPr>
-          <p:cNvSpPr>
-            <a:spLocks noGrp="1"/>
-          </p:cNvSpPr>
-          <p:nvPr/>
-        </p:nvSpPr>
-        <p:spPr>
-          <a:xfrm>
-            <a:off x="666750" y="2324100"/>
-            <a:ext cx="171450" cy="171450"/>
-          </a:xfrm>
-          <a:prstGeom prst="ellipse">
-            <a:avLst/>
-          </a:prstGeom>
-          <a:solidFill>
-            <a:srgbClr val="16875C"/>
-          </a:solidFill>
-          <a:ln w="0">
-            <a:noFill/>
-            <a:prstDash val="solid"/>
-          </a:ln>
-        </p:spPr>
-      </p:sp>
-      <p:sp>
-        <p:nvSpPr>
-          <p:cNvPr id="23" name="s17-left-check-0">
-            <a:extLst>
-              <a:ext uri="{FF2B5EF4-FFF2-40B4-BE49-F238E27FC236}">
-                <a16:creationId xmlns:a16="http://schemas.microsoft.com/office/drawing/2014/main" id="{3BEEEA8B-AF7B-4A80-B018-C58700B9621E}"/>
-              </a:ext>
-            </a:extLst>
-          </p:cNvPr>
-          <p:cNvSpPr>
-            <a:spLocks noGrp="1"/>
-          </p:cNvSpPr>
-          <p:nvPr/>
-        </p:nvSpPr>
-        <p:spPr>
-          <a:xfrm>
-            <a:off x="666750" y="2295525"/>
-            <a:ext cx="171450" cy="200025"/>
-          </a:xfrm>
-          <a:prstGeom prst="rect">
-            <a:avLst/>
-          </a:prstGeom>
-          <a:noFill/>
-          <a:ln w="0">
-            <a:noFill/>
-            <a:prstDash val="solid"/>
-          </a:ln>
-        </p:spPr>
-        <p:txBody>
-          <a:bodyPr wrap="square" lIns="0" tIns="0" rIns="0" bIns="0" anchor="ctr">
-            <a:normAutofit/>
-          </a:bodyPr>
-          <a:lstStyle/>
-          <a:p>
-            <a:pPr algn="ctr">
-              <a:defRPr sz="900" b="1">
-                <a:solidFill>
-                  <a:srgbClr val="FFFFFF"/>
-                </a:solidFill>
-                <a:latin typeface="Noto Sans CJK JP"/>
-                <a:ea typeface="Noto Sans CJK JP"/>
-                <a:cs typeface="Noto Sans CJK JP"/>
-              </a:defRPr>
-            </a:pPr>
-            <a:r>
-              <a:rPr sz="900" b="1">
-                <a:solidFill>
-                  <a:srgbClr val="FFFFFF"/>
-                </a:solidFill>
-                <a:latin typeface="Noto Sans CJK JP"/>
-                <a:ea typeface="Noto Sans CJK JP"/>
-                <a:cs typeface="Noto Sans CJK JP"/>
-              </a:rPr>
-              <a:t>✓</a:t>
-            </a:r>
-          </a:p>
-        </p:txBody>
-      </p:sp>
-      <p:sp>
-        <p:nvSpPr>
-          <p:cNvPr id="24" name="s17-left-0">
-            <a:extLst>
-              <a:ext uri="{FF2B5EF4-FFF2-40B4-BE49-F238E27FC236}">
-                <a16:creationId xmlns:a16="http://schemas.microsoft.com/office/drawing/2014/main" id="{3C51BF55-F38F-4DC8-9EE0-7B0E8070C3B9}"/>
-              </a:ext>
-            </a:extLst>
-          </p:cNvPr>
-          <p:cNvSpPr>
-            <a:spLocks noGrp="1"/>
-          </p:cNvSpPr>
-          <p:nvPr/>
-        </p:nvSpPr>
-        <p:spPr>
-          <a:xfrm>
-            <a:off x="952500" y="2276475"/>
-            <a:ext cx="3286125" cy="266700"/>
-          </a:xfrm>
-          <a:prstGeom prst="rect">
-            <a:avLst/>
-          </a:prstGeom>
-          <a:noFill/>
-          <a:ln w="0">
-            <a:noFill/>
-            <a:prstDash val="solid"/>
-          </a:ln>
-        </p:spPr>
-        <p:txBody>
-          <a:bodyPr wrap="square" lIns="0" tIns="0" rIns="0" bIns="0" anchor="ctr">
-            <a:normAutofit/>
-          </a:bodyPr>
-          <a:lstStyle/>
-          <a:p>
-            <a:pPr algn="l">
-              <a:defRPr sz="1035" b="0">
-                <a:solidFill>
-                  <a:srgbClr val="111827"/>
-                </a:solidFill>
-                <a:latin typeface="Noto Sans CJK JP"/>
-                <a:ea typeface="Noto Sans CJK JP"/>
-                <a:cs typeface="Noto Sans CJK JP"/>
-              </a:defRPr>
-            </a:pPr>
-            <a:r>
-              <a:rPr sz="1035" b="0">
-                <a:solidFill>
-                  <a:srgbClr val="111827"/>
-                </a:solidFill>
-                <a:latin typeface="Noto Sans CJK JP"/>
-                <a:ea typeface="Noto Sans CJK JP"/>
-                <a:cs typeface="Noto Sans CJK JP"/>
-              </a:rPr>
-              <a:t>4解概念を共通制約  0 ≤ π ≤ X  で定式化</a:t>
-            </a:r>
-          </a:p>
-        </p:txBody>
-      </p:sp>
-      <p:sp>
-        <p:nvSpPr>
-          <p:cNvPr id="25" name="s17-left-dot-1">
-            <a:extLst>
-              <a:ext uri="{FF2B5EF4-FFF2-40B4-BE49-F238E27FC236}">
-                <a16:creationId xmlns:a16="http://schemas.microsoft.com/office/drawing/2014/main" id="{096B6171-1500-4CA9-B4F8-9A0B76D00707}"/>
-              </a:ext>
-            </a:extLst>
-          </p:cNvPr>
-          <p:cNvSpPr>
-            <a:spLocks noGrp="1"/>
-          </p:cNvSpPr>
-          <p:nvPr/>
-        </p:nvSpPr>
-        <p:spPr>
-          <a:xfrm>
-            <a:off x="666750" y="2705100"/>
-            <a:ext cx="171450" cy="171450"/>
-          </a:xfrm>
-          <a:prstGeom prst="ellipse">
-            <a:avLst/>
-          </a:prstGeom>
-          <a:solidFill>
-            <a:srgbClr val="16875C"/>
-          </a:solidFill>
-          <a:ln w="0">
-            <a:noFill/>
-            <a:prstDash val="solid"/>
-          </a:ln>
-        </p:spPr>
-      </p:sp>
-      <p:sp>
-        <p:nvSpPr>
-          <p:cNvPr id="26" name="s17-left-check-1">
-            <a:extLst>
-              <a:ext uri="{FF2B5EF4-FFF2-40B4-BE49-F238E27FC236}">
-                <a16:creationId xmlns:a16="http://schemas.microsoft.com/office/drawing/2014/main" id="{024AE3D3-0C6F-4A40-824F-FA66D76F2B3E}"/>
-              </a:ext>
-            </a:extLst>
-          </p:cNvPr>
-          <p:cNvSpPr>
-            <a:spLocks noGrp="1"/>
-          </p:cNvSpPr>
-          <p:nvPr/>
-        </p:nvSpPr>
-        <p:spPr>
-          <a:xfrm>
-            <a:off x="666750" y="2676525"/>
-            <a:ext cx="171450" cy="200025"/>
-          </a:xfrm>
-          <a:prstGeom prst="rect">
-            <a:avLst/>
-          </a:prstGeom>
-          <a:noFill/>
-          <a:ln w="0">
-            <a:noFill/>
-            <a:prstDash val="solid"/>
-          </a:ln>
-        </p:spPr>
-        <p:txBody>
-          <a:bodyPr wrap="square" lIns="0" tIns="0" rIns="0" bIns="0" anchor="ctr">
-            <a:normAutofit/>
-          </a:bodyPr>
-          <a:lstStyle/>
-          <a:p>
-            <a:pPr algn="ctr">
-              <a:defRPr sz="900" b="1">
-                <a:solidFill>
-                  <a:srgbClr val="FFFFFF"/>
-                </a:solidFill>
-                <a:latin typeface="Noto Sans CJK JP"/>
-                <a:ea typeface="Noto Sans CJK JP"/>
-                <a:cs typeface="Noto Sans CJK JP"/>
-              </a:defRPr>
-            </a:pPr>
-            <a:r>
-              <a:rPr sz="900" b="1">
-                <a:solidFill>
-                  <a:srgbClr val="FFFFFF"/>
-                </a:solidFill>
-                <a:latin typeface="Noto Sans CJK JP"/>
-                <a:ea typeface="Noto Sans CJK JP"/>
-                <a:cs typeface="Noto Sans CJK JP"/>
-              </a:rPr>
-              <a:t>✓</a:t>
-            </a:r>
-          </a:p>
-        </p:txBody>
-      </p:sp>
-      <p:sp>
-        <p:nvSpPr>
-          <p:cNvPr id="28" name="s17-left-dot-2">
-            <a:extLst>
-              <a:ext uri="{FF2B5EF4-FFF2-40B4-BE49-F238E27FC236}">
-                <a16:creationId xmlns:a16="http://schemas.microsoft.com/office/drawing/2014/main" id="{72837AFD-1285-486E-BDC5-F762572EE84C}"/>
-              </a:ext>
-            </a:extLst>
-          </p:cNvPr>
-          <p:cNvSpPr>
-            <a:spLocks noGrp="1"/>
-          </p:cNvSpPr>
-          <p:nvPr/>
-        </p:nvSpPr>
-        <p:spPr>
-          <a:xfrm>
-            <a:off x="666750" y="3086100"/>
-            <a:ext cx="171450" cy="171450"/>
-          </a:xfrm>
-          <a:prstGeom prst="ellipse">
-            <a:avLst/>
-          </a:prstGeom>
-          <a:solidFill>
-            <a:srgbClr val="16875C"/>
-          </a:solidFill>
-          <a:ln w="0">
-            <a:noFill/>
-            <a:prstDash val="solid"/>
-          </a:ln>
-        </p:spPr>
-      </p:sp>
-      <p:sp>
-        <p:nvSpPr>
-          <p:cNvPr id="29" name="s17-left-check-2">
-            <a:extLst>
-              <a:ext uri="{FF2B5EF4-FFF2-40B4-BE49-F238E27FC236}">
-                <a16:creationId xmlns:a16="http://schemas.microsoft.com/office/drawing/2014/main" id="{993864C8-FDB2-41A0-87C9-C8667DC50C32}"/>
-              </a:ext>
-            </a:extLst>
-          </p:cNvPr>
-          <p:cNvSpPr>
-            <a:spLocks noGrp="1"/>
-          </p:cNvSpPr>
-          <p:nvPr/>
-        </p:nvSpPr>
-        <p:spPr>
-          <a:xfrm>
-            <a:off x="666750" y="3057525"/>
-            <a:ext cx="171450" cy="200025"/>
-          </a:xfrm>
-          <a:prstGeom prst="rect">
-            <a:avLst/>
-          </a:prstGeom>
-          <a:noFill/>
-          <a:ln w="0">
-            <a:noFill/>
-            <a:prstDash val="solid"/>
-          </a:ln>
-        </p:spPr>
-        <p:txBody>
-          <a:bodyPr wrap="square" lIns="0" tIns="0" rIns="0" bIns="0" anchor="ctr">
-            <a:normAutofit/>
-          </a:bodyPr>
-          <a:lstStyle/>
-          <a:p>
-            <a:pPr algn="ctr">
-              <a:defRPr sz="900" b="1">
-                <a:solidFill>
-                  <a:srgbClr val="FFFFFF"/>
-                </a:solidFill>
-                <a:latin typeface="Noto Sans CJK JP"/>
-                <a:ea typeface="Noto Sans CJK JP"/>
-                <a:cs typeface="Noto Sans CJK JP"/>
-              </a:defRPr>
-            </a:pPr>
-            <a:r>
-              <a:rPr sz="900" b="1">
-                <a:solidFill>
-                  <a:srgbClr val="FFFFFF"/>
-                </a:solidFill>
-                <a:latin typeface="Noto Sans CJK JP"/>
-                <a:ea typeface="Noto Sans CJK JP"/>
-                <a:cs typeface="Noto Sans CJK JP"/>
-              </a:rPr>
-              <a:t>✓</a:t>
-            </a:r>
-          </a:p>
-        </p:txBody>
-      </p:sp>
-      <p:sp>
-        <p:nvSpPr>
-          <p:cNvPr id="30" name="s17-left-2">
-            <a:extLst>
-              <a:ext uri="{FF2B5EF4-FFF2-40B4-BE49-F238E27FC236}">
-                <a16:creationId xmlns:a16="http://schemas.microsoft.com/office/drawing/2014/main" id="{3D16B206-ED9C-4F45-A5D4-00B03A3F99C8}"/>
-              </a:ext>
-            </a:extLst>
-          </p:cNvPr>
-          <p:cNvSpPr>
-            <a:spLocks noGrp="1"/>
-          </p:cNvSpPr>
-          <p:nvPr/>
-        </p:nvSpPr>
-        <p:spPr>
-          <a:xfrm>
-            <a:off x="952500" y="2641240"/>
-            <a:ext cx="3286125" cy="266700"/>
-          </a:xfrm>
-          <a:prstGeom prst="rect">
-            <a:avLst/>
-          </a:prstGeom>
-          <a:noFill/>
-          <a:ln w="0">
-            <a:noFill/>
-            <a:prstDash val="solid"/>
-          </a:ln>
-        </p:spPr>
-        <p:txBody>
-          <a:bodyPr wrap="square" lIns="0" tIns="0" rIns="0" bIns="0" anchor="ctr">
-            <a:normAutofit/>
-          </a:bodyPr>
-          <a:lstStyle/>
-          <a:p>
-            <a:pPr algn="l">
-              <a:defRPr sz="1035" b="0">
-                <a:solidFill>
-                  <a:srgbClr val="111827"/>
-                </a:solidFill>
-                <a:latin typeface="Noto Sans CJK JP"/>
-                <a:ea typeface="Noto Sans CJK JP"/>
-                <a:cs typeface="Noto Sans CJK JP"/>
-              </a:defRPr>
-            </a:pPr>
-            <a:r>
-              <a:rPr sz="1035" b="0" dirty="0" err="1">
-                <a:solidFill>
-                  <a:srgbClr val="111827"/>
-                </a:solidFill>
-                <a:latin typeface="Noto Sans CJK JP"/>
-                <a:ea typeface="Noto Sans CJK JP"/>
-                <a:cs typeface="Noto Sans CJK JP"/>
-              </a:rPr>
-              <a:t>共通の後退・前進エンジンとrolling評価</a:t>
-            </a:r>
-            <a:endParaRPr sz="1035" b="0" dirty="0">
-              <a:solidFill>
-                <a:srgbClr val="111827"/>
-              </a:solidFill>
-              <a:latin typeface="Noto Sans CJK JP"/>
-              <a:ea typeface="Noto Sans CJK JP"/>
-              <a:cs typeface="Noto Sans CJK JP"/>
-            </a:endParaRPr>
-          </a:p>
-        </p:txBody>
-      </p:sp>
-      <p:sp>
-        <p:nvSpPr>
-          <p:cNvPr id="31" name="s17-left-dot-3">
-            <a:extLst>
-              <a:ext uri="{FF2B5EF4-FFF2-40B4-BE49-F238E27FC236}">
-                <a16:creationId xmlns:a16="http://schemas.microsoft.com/office/drawing/2014/main" id="{9687B7F9-E24D-44E3-8D08-848BFA84E070}"/>
-              </a:ext>
-            </a:extLst>
-          </p:cNvPr>
-          <p:cNvSpPr>
-            <a:spLocks noGrp="1"/>
-          </p:cNvSpPr>
-          <p:nvPr/>
-        </p:nvSpPr>
-        <p:spPr>
-          <a:xfrm>
-            <a:off x="666750" y="3467100"/>
-            <a:ext cx="171450" cy="171450"/>
-          </a:xfrm>
-          <a:prstGeom prst="ellipse">
-            <a:avLst/>
-          </a:prstGeom>
-          <a:solidFill>
-            <a:srgbClr val="16875C"/>
-          </a:solidFill>
-          <a:ln w="0">
-            <a:noFill/>
-            <a:prstDash val="solid"/>
-          </a:ln>
-        </p:spPr>
-      </p:sp>
-      <p:sp>
-        <p:nvSpPr>
-          <p:cNvPr id="32" name="s17-left-check-3">
-            <a:extLst>
-              <a:ext uri="{FF2B5EF4-FFF2-40B4-BE49-F238E27FC236}">
-                <a16:creationId xmlns:a16="http://schemas.microsoft.com/office/drawing/2014/main" id="{30B1742C-6E65-435E-9418-ECB90DF1D717}"/>
-              </a:ext>
-            </a:extLst>
-          </p:cNvPr>
-          <p:cNvSpPr>
-            <a:spLocks noGrp="1"/>
-          </p:cNvSpPr>
-          <p:nvPr/>
-        </p:nvSpPr>
-        <p:spPr>
-          <a:xfrm>
-            <a:off x="666750" y="3438525"/>
-            <a:ext cx="171450" cy="200025"/>
-          </a:xfrm>
-          <a:prstGeom prst="rect">
-            <a:avLst/>
-          </a:prstGeom>
-          <a:noFill/>
-          <a:ln w="0">
-            <a:noFill/>
-            <a:prstDash val="solid"/>
-          </a:ln>
-        </p:spPr>
-        <p:txBody>
-          <a:bodyPr wrap="square" lIns="0" tIns="0" rIns="0" bIns="0" anchor="ctr">
-            <a:normAutofit/>
-          </a:bodyPr>
-          <a:lstStyle/>
-          <a:p>
-            <a:pPr algn="ctr">
-              <a:defRPr sz="900" b="1">
-                <a:solidFill>
-                  <a:srgbClr val="FFFFFF"/>
-                </a:solidFill>
-                <a:latin typeface="Noto Sans CJK JP"/>
-                <a:ea typeface="Noto Sans CJK JP"/>
-                <a:cs typeface="Noto Sans CJK JP"/>
-              </a:defRPr>
-            </a:pPr>
-            <a:r>
-              <a:rPr sz="900" b="1">
-                <a:solidFill>
-                  <a:srgbClr val="FFFFFF"/>
-                </a:solidFill>
-                <a:latin typeface="Noto Sans CJK JP"/>
-                <a:ea typeface="Noto Sans CJK JP"/>
-                <a:cs typeface="Noto Sans CJK JP"/>
-              </a:rPr>
-              <a:t>✓</a:t>
-            </a:r>
-          </a:p>
-        </p:txBody>
-      </p:sp>
-      <p:sp>
-        <p:nvSpPr>
-          <p:cNvPr id="33" name="s17-left-3">
-            <a:extLst>
-              <a:ext uri="{FF2B5EF4-FFF2-40B4-BE49-F238E27FC236}">
-                <a16:creationId xmlns:a16="http://schemas.microsoft.com/office/drawing/2014/main" id="{DD191EE7-A888-4A08-B897-D2CC512857E9}"/>
-              </a:ext>
-            </a:extLst>
-          </p:cNvPr>
-          <p:cNvSpPr>
-            <a:spLocks noGrp="1"/>
-          </p:cNvSpPr>
-          <p:nvPr/>
-        </p:nvSpPr>
-        <p:spPr>
-          <a:xfrm>
-            <a:off x="952500" y="3022240"/>
-            <a:ext cx="3286125" cy="266700"/>
-          </a:xfrm>
-          <a:prstGeom prst="rect">
-            <a:avLst/>
-          </a:prstGeom>
-          <a:noFill/>
-          <a:ln w="0">
-            <a:noFill/>
-            <a:prstDash val="solid"/>
-          </a:ln>
-        </p:spPr>
-        <p:txBody>
-          <a:bodyPr wrap="square" lIns="0" tIns="0" rIns="0" bIns="0" anchor="ctr">
-            <a:normAutofit/>
-          </a:bodyPr>
-          <a:lstStyle/>
-          <a:p>
-            <a:pPr algn="l">
-              <a:defRPr sz="1035" b="0">
-                <a:solidFill>
-                  <a:srgbClr val="111827"/>
-                </a:solidFill>
-                <a:latin typeface="Noto Sans CJK JP"/>
-                <a:ea typeface="Noto Sans CJK JP"/>
-                <a:cs typeface="Noto Sans CJK JP"/>
-              </a:defRPr>
-            </a:pPr>
-            <a:r>
-              <a:rPr sz="1035" b="0" dirty="0" err="1">
-                <a:solidFill>
-                  <a:srgbClr val="111827"/>
-                </a:solidFill>
-                <a:latin typeface="Noto Sans CJK JP"/>
-                <a:ea typeface="Noto Sans CJK JP"/>
-                <a:cs typeface="Noto Sans CJK JP"/>
-              </a:rPr>
-              <a:t>clip誤差の解概念依存性を定量化</a:t>
-            </a:r>
-            <a:endParaRPr sz="1035" b="0" dirty="0">
-              <a:solidFill>
-                <a:srgbClr val="111827"/>
-              </a:solidFill>
-              <a:latin typeface="Noto Sans CJK JP"/>
-              <a:ea typeface="Noto Sans CJK JP"/>
-              <a:cs typeface="Noto Sans CJK JP"/>
-            </a:endParaRPr>
-          </a:p>
-        </p:txBody>
-      </p:sp>
-      <p:sp>
-        <p:nvSpPr>
-          <p:cNvPr id="34" name="s17-left-dot-4">
-            <a:extLst>
-              <a:ext uri="{FF2B5EF4-FFF2-40B4-BE49-F238E27FC236}">
-                <a16:creationId xmlns:a16="http://schemas.microsoft.com/office/drawing/2014/main" id="{09B4A6DE-BFCB-4A88-8AE5-447BC8C20B62}"/>
-              </a:ext>
-            </a:extLst>
-          </p:cNvPr>
-          <p:cNvSpPr>
-            <a:spLocks noGrp="1"/>
-          </p:cNvSpPr>
-          <p:nvPr/>
-        </p:nvSpPr>
-        <p:spPr>
-          <a:xfrm>
-            <a:off x="666750" y="3848100"/>
-            <a:ext cx="171450" cy="171450"/>
-          </a:xfrm>
-          <a:prstGeom prst="ellipse">
-            <a:avLst/>
-          </a:prstGeom>
-          <a:solidFill>
-            <a:srgbClr val="16875C"/>
-          </a:solidFill>
-          <a:ln w="0">
-            <a:noFill/>
-            <a:prstDash val="solid"/>
-          </a:ln>
-        </p:spPr>
-      </p:sp>
-      <p:sp>
-        <p:nvSpPr>
-          <p:cNvPr id="35" name="s17-left-check-4">
-            <a:extLst>
-              <a:ext uri="{FF2B5EF4-FFF2-40B4-BE49-F238E27FC236}">
-                <a16:creationId xmlns:a16="http://schemas.microsoft.com/office/drawing/2014/main" id="{58D63A91-BEBD-4AFE-AE0F-08BC3ECB5348}"/>
-              </a:ext>
-            </a:extLst>
-          </p:cNvPr>
-          <p:cNvSpPr>
-            <a:spLocks noGrp="1"/>
-          </p:cNvSpPr>
-          <p:nvPr/>
-        </p:nvSpPr>
-        <p:spPr>
-          <a:xfrm>
-            <a:off x="666750" y="3819525"/>
-            <a:ext cx="171450" cy="200025"/>
-          </a:xfrm>
-          <a:prstGeom prst="rect">
-            <a:avLst/>
-          </a:prstGeom>
-          <a:noFill/>
-          <a:ln w="0">
-            <a:noFill/>
-            <a:prstDash val="solid"/>
-          </a:ln>
-        </p:spPr>
-        <p:txBody>
-          <a:bodyPr wrap="square" lIns="0" tIns="0" rIns="0" bIns="0" anchor="ctr">
-            <a:normAutofit/>
-          </a:bodyPr>
-          <a:lstStyle/>
-          <a:p>
-            <a:pPr algn="ctr">
-              <a:defRPr sz="900" b="1">
-                <a:solidFill>
-                  <a:srgbClr val="FFFFFF"/>
-                </a:solidFill>
-                <a:latin typeface="Noto Sans CJK JP"/>
-                <a:ea typeface="Noto Sans CJK JP"/>
-                <a:cs typeface="Noto Sans CJK JP"/>
-              </a:defRPr>
-            </a:pPr>
-            <a:r>
-              <a:rPr sz="900" b="1">
-                <a:solidFill>
-                  <a:srgbClr val="FFFFFF"/>
-                </a:solidFill>
-                <a:latin typeface="Noto Sans CJK JP"/>
-                <a:ea typeface="Noto Sans CJK JP"/>
-                <a:cs typeface="Noto Sans CJK JP"/>
-              </a:rPr>
-              <a:t>✓</a:t>
-            </a:r>
-          </a:p>
-        </p:txBody>
-      </p:sp>
-      <p:sp>
-        <p:nvSpPr>
-          <p:cNvPr id="36" name="s17-left-4">
-            <a:extLst>
-              <a:ext uri="{FF2B5EF4-FFF2-40B4-BE49-F238E27FC236}">
-                <a16:creationId xmlns:a16="http://schemas.microsoft.com/office/drawing/2014/main" id="{FBA16578-2D60-4C87-B214-E3445A18010A}"/>
-              </a:ext>
-            </a:extLst>
-          </p:cNvPr>
-          <p:cNvSpPr>
-            <a:spLocks noGrp="1"/>
-          </p:cNvSpPr>
-          <p:nvPr/>
-        </p:nvSpPr>
-        <p:spPr>
-          <a:xfrm>
-            <a:off x="952500" y="3800475"/>
-            <a:ext cx="3286125" cy="266700"/>
-          </a:xfrm>
-          <a:prstGeom prst="rect">
-            <a:avLst/>
-          </a:prstGeom>
-          <a:noFill/>
-          <a:ln w="0">
-            <a:noFill/>
-            <a:prstDash val="solid"/>
-          </a:ln>
-        </p:spPr>
-        <p:txBody>
-          <a:bodyPr wrap="square" lIns="0" tIns="0" rIns="0" bIns="0" anchor="ctr">
-            <a:normAutofit/>
-          </a:bodyPr>
-          <a:lstStyle/>
-          <a:p>
-            <a:pPr algn="l">
-              <a:defRPr sz="1035" b="0">
-                <a:solidFill>
-                  <a:srgbClr val="111827"/>
-                </a:solidFill>
-                <a:latin typeface="Noto Sans CJK JP"/>
-                <a:ea typeface="Noto Sans CJK JP"/>
-                <a:cs typeface="Noto Sans CJK JP"/>
-              </a:defRPr>
-            </a:pPr>
-            <a:r>
-              <a:rPr sz="1035" b="1">
-                <a:solidFill>
-                  <a:srgbClr val="111827"/>
-                </a:solidFill>
-                <a:latin typeface="Noto Sans CJK JP"/>
-                <a:ea typeface="Noto Sans CJK JP"/>
-                <a:cs typeface="Noto Sans CJK JP"/>
-              </a:rPr>
-              <a:t>η = 0 で MVS → MV の入れ子検証</a:t>
-            </a:r>
-          </a:p>
-        </p:txBody>
-      </p:sp>
-      <p:sp>
-        <p:nvSpPr>
-          <p:cNvPr id="37" name="s17-right-icon-0">
-            <a:extLst>
-              <a:ext uri="{FF2B5EF4-FFF2-40B4-BE49-F238E27FC236}">
-                <a16:creationId xmlns:a16="http://schemas.microsoft.com/office/drawing/2014/main" id="{E8381DEE-3240-4724-9EAB-D9C2A00A9044}"/>
-              </a:ext>
-            </a:extLst>
-          </p:cNvPr>
-          <p:cNvSpPr>
-            <a:spLocks noGrp="1"/>
-          </p:cNvSpPr>
-          <p:nvPr/>
-        </p:nvSpPr>
-        <p:spPr>
-          <a:xfrm>
-            <a:off x="4953000" y="2305050"/>
-            <a:ext cx="171450" cy="209550"/>
-          </a:xfrm>
-          <a:prstGeom prst="rect">
-            <a:avLst/>
-          </a:prstGeom>
-          <a:noFill/>
-          <a:ln w="0">
-            <a:noFill/>
-            <a:prstDash val="solid"/>
-          </a:ln>
-        </p:spPr>
-        <p:txBody>
-          <a:bodyPr wrap="square" lIns="0" tIns="0" rIns="0" bIns="0" anchor="ctr">
-            <a:normAutofit/>
-          </a:bodyPr>
-          <a:lstStyle/>
-          <a:p>
-            <a:pPr algn="ctr">
-              <a:defRPr sz="1125" b="1">
-                <a:solidFill>
-                  <a:srgbClr val="D94138"/>
-                </a:solidFill>
-                <a:latin typeface="Noto Sans CJK JP"/>
-                <a:ea typeface="Noto Sans CJK JP"/>
-                <a:cs typeface="Noto Sans CJK JP"/>
-              </a:defRPr>
-            </a:pPr>
-            <a:r>
-              <a:rPr sz="1125" b="1">
-                <a:solidFill>
-                  <a:srgbClr val="D94138"/>
-                </a:solidFill>
-                <a:latin typeface="Noto Sans CJK JP"/>
-                <a:ea typeface="Noto Sans CJK JP"/>
-                <a:cs typeface="Noto Sans CJK JP"/>
-              </a:rPr>
-              <a:t>○</a:t>
-            </a:r>
-          </a:p>
-        </p:txBody>
-      </p:sp>
-      <p:sp>
-        <p:nvSpPr>
-          <p:cNvPr id="38" name="s17-right-0">
-            <a:extLst>
-              <a:ext uri="{FF2B5EF4-FFF2-40B4-BE49-F238E27FC236}">
-                <a16:creationId xmlns:a16="http://schemas.microsoft.com/office/drawing/2014/main" id="{B031AE03-3622-444C-ACCC-FDBC6C7F70D5}"/>
-              </a:ext>
-            </a:extLst>
-          </p:cNvPr>
-          <p:cNvSpPr>
-            <a:spLocks noGrp="1"/>
-          </p:cNvSpPr>
-          <p:nvPr/>
-        </p:nvSpPr>
-        <p:spPr>
-          <a:xfrm>
-            <a:off x="5219700" y="2276475"/>
-            <a:ext cx="3333750" cy="266700"/>
-          </a:xfrm>
-          <a:prstGeom prst="rect">
-            <a:avLst/>
-          </a:prstGeom>
-          <a:noFill/>
-          <a:ln w="0">
-            <a:noFill/>
-            <a:prstDash val="solid"/>
-          </a:ln>
-        </p:spPr>
-        <p:txBody>
-          <a:bodyPr wrap="square" lIns="0" tIns="0" rIns="0" bIns="0" anchor="ctr">
-            <a:normAutofit/>
-          </a:bodyPr>
-          <a:lstStyle/>
-          <a:p>
-            <a:pPr algn="l">
-              <a:defRPr sz="1035" b="0">
-                <a:solidFill>
-                  <a:srgbClr val="111827"/>
-                </a:solidFill>
-                <a:latin typeface="Noto Sans CJK JP"/>
-                <a:ea typeface="Noto Sans CJK JP"/>
-                <a:cs typeface="Noto Sans CJK JP"/>
-              </a:defRPr>
-            </a:pPr>
-            <a:r>
-              <a:rPr lang="ja-JP" altLang="en-US" sz="1035" b="0" dirty="0">
-                <a:solidFill>
-                  <a:srgbClr val="111827"/>
-                </a:solidFill>
-                <a:latin typeface="Noto Sans CJK JP"/>
-                <a:ea typeface="Noto Sans CJK JP"/>
-                <a:cs typeface="Noto Sans CJK JP"/>
-              </a:rPr>
-              <a:t>制約付き</a:t>
-            </a:r>
-            <a:r>
-              <a:rPr sz="1035" b="0" dirty="0" err="1">
-                <a:solidFill>
-                  <a:srgbClr val="111827"/>
-                </a:solidFill>
-                <a:latin typeface="Noto Sans CJK JP"/>
-                <a:ea typeface="Noto Sans CJK JP"/>
-                <a:cs typeface="Noto Sans CJK JP"/>
-              </a:rPr>
-              <a:t>cTCMV・dTCMV均衡の大域的存在</a:t>
-            </a:r>
-            <a:r>
-              <a:rPr lang="ja-JP" altLang="en-US" sz="1035" b="0" dirty="0">
-                <a:solidFill>
-                  <a:srgbClr val="111827"/>
-                </a:solidFill>
-                <a:latin typeface="Noto Sans CJK JP"/>
-                <a:ea typeface="Noto Sans CJK JP"/>
-                <a:cs typeface="Noto Sans CJK JP"/>
-              </a:rPr>
-              <a:t>の</a:t>
-            </a:r>
-            <a:r>
-              <a:rPr sz="1035" b="0" dirty="0" err="1">
-                <a:solidFill>
-                  <a:srgbClr val="111827"/>
-                </a:solidFill>
-                <a:latin typeface="Noto Sans CJK JP"/>
-                <a:ea typeface="Noto Sans CJK JP"/>
-                <a:cs typeface="Noto Sans CJK JP"/>
-              </a:rPr>
-              <a:t>一意性</a:t>
-            </a:r>
-            <a:endParaRPr sz="1035" b="0" dirty="0">
-              <a:solidFill>
-                <a:srgbClr val="111827"/>
-              </a:solidFill>
-              <a:latin typeface="Noto Sans CJK JP"/>
-              <a:ea typeface="Noto Sans CJK JP"/>
-              <a:cs typeface="Noto Sans CJK JP"/>
-            </a:endParaRPr>
-          </a:p>
-        </p:txBody>
-      </p:sp>
-      <p:sp>
-        <p:nvSpPr>
-          <p:cNvPr id="39" name="s17-right-icon-1">
-            <a:extLst>
-              <a:ext uri="{FF2B5EF4-FFF2-40B4-BE49-F238E27FC236}">
-                <a16:creationId xmlns:a16="http://schemas.microsoft.com/office/drawing/2014/main" id="{16C19EB9-1E5B-4439-B912-12537A6203CD}"/>
-              </a:ext>
-            </a:extLst>
-          </p:cNvPr>
-          <p:cNvSpPr>
-            <a:spLocks noGrp="1"/>
-          </p:cNvSpPr>
-          <p:nvPr/>
-        </p:nvSpPr>
-        <p:spPr>
-          <a:xfrm>
-            <a:off x="4953000" y="2686050"/>
-            <a:ext cx="171450" cy="209550"/>
-          </a:xfrm>
-          <a:prstGeom prst="rect">
-            <a:avLst/>
-          </a:prstGeom>
-          <a:noFill/>
-          <a:ln w="0">
-            <a:noFill/>
-            <a:prstDash val="solid"/>
-          </a:ln>
-        </p:spPr>
-        <p:txBody>
-          <a:bodyPr wrap="square" lIns="0" tIns="0" rIns="0" bIns="0" anchor="ctr">
-            <a:normAutofit/>
-          </a:bodyPr>
-          <a:lstStyle/>
-          <a:p>
-            <a:pPr algn="ctr">
-              <a:defRPr sz="1125" b="1">
-                <a:solidFill>
-                  <a:srgbClr val="D94138"/>
-                </a:solidFill>
-                <a:latin typeface="Noto Sans CJK JP"/>
-                <a:ea typeface="Noto Sans CJK JP"/>
-                <a:cs typeface="Noto Sans CJK JP"/>
-              </a:defRPr>
-            </a:pPr>
-            <a:r>
-              <a:rPr sz="1125" b="1">
-                <a:solidFill>
-                  <a:srgbClr val="D94138"/>
-                </a:solidFill>
-                <a:latin typeface="Noto Sans CJK JP"/>
-                <a:ea typeface="Noto Sans CJK JP"/>
-                <a:cs typeface="Noto Sans CJK JP"/>
-              </a:rPr>
-              <a:t>○</a:t>
-            </a:r>
-          </a:p>
-        </p:txBody>
-      </p:sp>
-      <p:sp>
-        <p:nvSpPr>
-          <p:cNvPr id="40" name="s17-right-1">
-            <a:extLst>
-              <a:ext uri="{FF2B5EF4-FFF2-40B4-BE49-F238E27FC236}">
-                <a16:creationId xmlns:a16="http://schemas.microsoft.com/office/drawing/2014/main" id="{1AFDA7E5-E31B-4598-B5B9-710517747A64}"/>
-              </a:ext>
-            </a:extLst>
-          </p:cNvPr>
-          <p:cNvSpPr>
-            <a:spLocks noGrp="1"/>
-          </p:cNvSpPr>
-          <p:nvPr/>
-        </p:nvSpPr>
-        <p:spPr>
-          <a:xfrm>
-            <a:off x="5219700" y="2657475"/>
-            <a:ext cx="3333750" cy="266700"/>
-          </a:xfrm>
-          <a:prstGeom prst="rect">
-            <a:avLst/>
-          </a:prstGeom>
-          <a:noFill/>
-          <a:ln w="0">
-            <a:noFill/>
-            <a:prstDash val="solid"/>
-          </a:ln>
-        </p:spPr>
-        <p:txBody>
-          <a:bodyPr wrap="square" lIns="0" tIns="0" rIns="0" bIns="0" anchor="ctr">
-            <a:normAutofit/>
-          </a:bodyPr>
-          <a:lstStyle/>
-          <a:p>
-            <a:pPr algn="l">
-              <a:defRPr sz="1035" b="0">
-                <a:solidFill>
-                  <a:srgbClr val="111827"/>
-                </a:solidFill>
-                <a:latin typeface="Noto Sans CJK JP"/>
-                <a:ea typeface="Noto Sans CJK JP"/>
-                <a:cs typeface="Noto Sans CJK JP"/>
-              </a:defRPr>
-            </a:pPr>
-            <a:r>
-              <a:rPr sz="1035" b="0" dirty="0" err="1">
-                <a:solidFill>
-                  <a:srgbClr val="111827"/>
-                </a:solidFill>
-                <a:latin typeface="Noto Sans CJK JP"/>
-                <a:ea typeface="Noto Sans CJK JP"/>
-                <a:cs typeface="Noto Sans CJK JP"/>
-              </a:rPr>
-              <a:t>時間・状態・制御・求積の共同収束</a:t>
-            </a:r>
-            <a:r>
-              <a:rPr lang="ja-JP" altLang="en-US" sz="1035" b="0" dirty="0">
-                <a:solidFill>
-                  <a:srgbClr val="111827"/>
-                </a:solidFill>
-                <a:latin typeface="Noto Sans CJK JP"/>
-                <a:ea typeface="Noto Sans CJK JP"/>
-                <a:cs typeface="Noto Sans CJK JP"/>
-              </a:rPr>
-              <a:t>メッシュ</a:t>
-            </a:r>
-            <a:endParaRPr sz="1035" b="0" dirty="0">
-              <a:solidFill>
-                <a:srgbClr val="111827"/>
-              </a:solidFill>
-              <a:latin typeface="Noto Sans CJK JP"/>
-              <a:ea typeface="Noto Sans CJK JP"/>
-              <a:cs typeface="Noto Sans CJK JP"/>
-            </a:endParaRPr>
-          </a:p>
-        </p:txBody>
-      </p:sp>
-      <p:sp>
-        <p:nvSpPr>
-          <p:cNvPr id="41" name="s17-right-icon-2">
-            <a:extLst>
-              <a:ext uri="{FF2B5EF4-FFF2-40B4-BE49-F238E27FC236}">
-                <a16:creationId xmlns:a16="http://schemas.microsoft.com/office/drawing/2014/main" id="{DC61D0A8-00F3-42F9-A9D7-70DF637D37E6}"/>
-              </a:ext>
-            </a:extLst>
-          </p:cNvPr>
-          <p:cNvSpPr>
-            <a:spLocks noGrp="1"/>
-          </p:cNvSpPr>
-          <p:nvPr/>
-        </p:nvSpPr>
-        <p:spPr>
-          <a:xfrm>
-            <a:off x="4953000" y="3067050"/>
-            <a:ext cx="171450" cy="209550"/>
-          </a:xfrm>
-          <a:prstGeom prst="rect">
-            <a:avLst/>
-          </a:prstGeom>
-          <a:noFill/>
-          <a:ln w="0">
-            <a:noFill/>
-            <a:prstDash val="solid"/>
-          </a:ln>
-        </p:spPr>
-        <p:txBody>
-          <a:bodyPr wrap="square" lIns="0" tIns="0" rIns="0" bIns="0" anchor="ctr">
-            <a:normAutofit/>
-          </a:bodyPr>
-          <a:lstStyle/>
-          <a:p>
-            <a:pPr algn="ctr">
-              <a:defRPr sz="1125" b="1">
-                <a:solidFill>
-                  <a:srgbClr val="D94138"/>
-                </a:solidFill>
-                <a:latin typeface="Noto Sans CJK JP"/>
-                <a:ea typeface="Noto Sans CJK JP"/>
-                <a:cs typeface="Noto Sans CJK JP"/>
-              </a:defRPr>
-            </a:pPr>
-            <a:r>
-              <a:rPr sz="1125" b="1">
-                <a:solidFill>
-                  <a:srgbClr val="D94138"/>
-                </a:solidFill>
-                <a:latin typeface="Noto Sans CJK JP"/>
-                <a:ea typeface="Noto Sans CJK JP"/>
-                <a:cs typeface="Noto Sans CJK JP"/>
-              </a:rPr>
-              <a:t>○</a:t>
-            </a:r>
-          </a:p>
-        </p:txBody>
-      </p:sp>
-      <p:sp>
-        <p:nvSpPr>
-          <p:cNvPr id="42" name="s17-right-2">
-            <a:extLst>
-              <a:ext uri="{FF2B5EF4-FFF2-40B4-BE49-F238E27FC236}">
-                <a16:creationId xmlns:a16="http://schemas.microsoft.com/office/drawing/2014/main" id="{1999D346-8198-4C82-9271-6A764B0AA2B7}"/>
-              </a:ext>
-            </a:extLst>
-          </p:cNvPr>
-          <p:cNvSpPr>
-            <a:spLocks noGrp="1"/>
-          </p:cNvSpPr>
-          <p:nvPr/>
-        </p:nvSpPr>
-        <p:spPr>
-          <a:xfrm>
-            <a:off x="5219700" y="3038475"/>
-            <a:ext cx="3333750" cy="266700"/>
-          </a:xfrm>
-          <a:prstGeom prst="rect">
-            <a:avLst/>
-          </a:prstGeom>
-          <a:noFill/>
-          <a:ln w="0">
-            <a:noFill/>
-            <a:prstDash val="solid"/>
-          </a:ln>
-        </p:spPr>
-        <p:txBody>
-          <a:bodyPr wrap="square" lIns="0" tIns="0" rIns="0" bIns="0" anchor="ctr">
-            <a:normAutofit/>
-          </a:bodyPr>
-          <a:lstStyle/>
-          <a:p>
-            <a:pPr algn="l">
-              <a:defRPr sz="1035" b="0">
-                <a:solidFill>
-                  <a:srgbClr val="111827"/>
-                </a:solidFill>
-                <a:latin typeface="Noto Sans CJK JP"/>
-                <a:ea typeface="Noto Sans CJK JP"/>
-                <a:cs typeface="Noto Sans CJK JP"/>
-              </a:defRPr>
-            </a:pPr>
-            <a:r>
-              <a:rPr sz="1035" b="0">
-                <a:solidFill>
-                  <a:srgbClr val="111827"/>
-                </a:solidFill>
-                <a:latin typeface="Noto Sans CJK JP"/>
-                <a:ea typeface="Noto Sans CJK JP"/>
-                <a:cs typeface="Noto Sans CJK JP"/>
-              </a:rPr>
-              <a:t>確率的所得・死亡・複数資産・取引費用</a:t>
-            </a:r>
-          </a:p>
-        </p:txBody>
-      </p:sp>
-      <p:sp>
-        <p:nvSpPr>
-          <p:cNvPr id="43" name="s17-right-icon-3">
-            <a:extLst>
-              <a:ext uri="{FF2B5EF4-FFF2-40B4-BE49-F238E27FC236}">
-                <a16:creationId xmlns:a16="http://schemas.microsoft.com/office/drawing/2014/main" id="{064CC93B-6C68-4533-8010-2F75E29DA92A}"/>
-              </a:ext>
-            </a:extLst>
-          </p:cNvPr>
-          <p:cNvSpPr>
-            <a:spLocks noGrp="1"/>
-          </p:cNvSpPr>
-          <p:nvPr/>
-        </p:nvSpPr>
-        <p:spPr>
-          <a:xfrm>
-            <a:off x="4953000" y="3448050"/>
-            <a:ext cx="171450" cy="209550"/>
-          </a:xfrm>
-          <a:prstGeom prst="rect">
-            <a:avLst/>
-          </a:prstGeom>
-          <a:noFill/>
-          <a:ln w="0">
-            <a:noFill/>
-            <a:prstDash val="solid"/>
-          </a:ln>
-        </p:spPr>
-        <p:txBody>
-          <a:bodyPr wrap="square" lIns="0" tIns="0" rIns="0" bIns="0" anchor="ctr">
-            <a:normAutofit/>
-          </a:bodyPr>
-          <a:lstStyle/>
-          <a:p>
-            <a:pPr algn="ctr">
-              <a:defRPr sz="1125" b="1">
-                <a:solidFill>
-                  <a:srgbClr val="D94138"/>
-                </a:solidFill>
-                <a:latin typeface="Noto Sans CJK JP"/>
-                <a:ea typeface="Noto Sans CJK JP"/>
-                <a:cs typeface="Noto Sans CJK JP"/>
-              </a:defRPr>
-            </a:pPr>
-            <a:r>
-              <a:rPr sz="1125" b="1" dirty="0">
-                <a:solidFill>
-                  <a:srgbClr val="D94138"/>
-                </a:solidFill>
-                <a:latin typeface="Noto Sans CJK JP"/>
-                <a:ea typeface="Noto Sans CJK JP"/>
-                <a:cs typeface="Noto Sans CJK JP"/>
-              </a:rPr>
-              <a:t>○</a:t>
-            </a:r>
-          </a:p>
-        </p:txBody>
-      </p:sp>
-      <p:sp>
-        <p:nvSpPr>
-          <p:cNvPr id="46" name="s17-right-4">
-            <a:extLst>
-              <a:ext uri="{FF2B5EF4-FFF2-40B4-BE49-F238E27FC236}">
-                <a16:creationId xmlns:a16="http://schemas.microsoft.com/office/drawing/2014/main" id="{2D5E0007-82DC-4C02-8BEB-0E8A0531DA98}"/>
-              </a:ext>
-            </a:extLst>
-          </p:cNvPr>
-          <p:cNvSpPr>
-            <a:spLocks noGrp="1"/>
-          </p:cNvSpPr>
-          <p:nvPr/>
-        </p:nvSpPr>
-        <p:spPr>
-          <a:xfrm>
-            <a:off x="5219700" y="3433220"/>
-            <a:ext cx="3333750" cy="266700"/>
-          </a:xfrm>
-          <a:prstGeom prst="rect">
-            <a:avLst/>
-          </a:prstGeom>
-          <a:noFill/>
-          <a:ln w="0">
-            <a:noFill/>
-            <a:prstDash val="solid"/>
-          </a:ln>
-        </p:spPr>
-        <p:txBody>
-          <a:bodyPr wrap="square" lIns="0" tIns="0" rIns="0" bIns="0" anchor="ctr">
-            <a:normAutofit/>
-          </a:bodyPr>
-          <a:lstStyle/>
-          <a:p>
-            <a:pPr algn="l">
-              <a:defRPr sz="1035" b="0">
-                <a:solidFill>
-                  <a:srgbClr val="111827"/>
-                </a:solidFill>
-                <a:latin typeface="Noto Sans CJK JP"/>
-                <a:ea typeface="Noto Sans CJK JP"/>
-                <a:cs typeface="Noto Sans CJK JP"/>
-              </a:defRPr>
-            </a:pPr>
-            <a:r>
-              <a:rPr lang="en-US" altLang="ja-JP" sz="1035" b="1" dirty="0">
-                <a:solidFill>
-                  <a:srgbClr val="111827"/>
-                </a:solidFill>
-                <a:latin typeface="Noto Sans CJK JP"/>
-                <a:ea typeface="Noto Sans CJK JP"/>
-                <a:cs typeface="Noto Sans CJK JP"/>
-              </a:rPr>
-              <a:t>MVS</a:t>
-            </a:r>
-            <a:r>
-              <a:rPr lang="ja-JP" altLang="en-US" sz="1035" b="1" dirty="0">
-                <a:solidFill>
-                  <a:srgbClr val="111827"/>
-                </a:solidFill>
-                <a:latin typeface="Noto Sans CJK JP"/>
-                <a:ea typeface="Noto Sans CJK JP"/>
-                <a:cs typeface="Noto Sans CJK JP"/>
-              </a:rPr>
-              <a:t>の理論的収束</a:t>
-            </a:r>
-            <a:endParaRPr sz="1035" b="1" dirty="0">
-              <a:solidFill>
-                <a:srgbClr val="111827"/>
-              </a:solidFill>
-              <a:latin typeface="Noto Sans CJK JP"/>
-              <a:ea typeface="Noto Sans CJK JP"/>
-              <a:cs typeface="Noto Sans CJK JP"/>
-            </a:endParaRPr>
-          </a:p>
-        </p:txBody>
-      </p:sp>
-      <p:sp>
-        <p:nvSpPr>
-          <p:cNvPr id="47" name="s17-governance-shape">
-            <a:extLst>
-              <a:ext uri="{FF2B5EF4-FFF2-40B4-BE49-F238E27FC236}">
-                <a16:creationId xmlns:a16="http://schemas.microsoft.com/office/drawing/2014/main" id="{7B119EE3-481C-4F86-80F8-C19166700FF4}"/>
-              </a:ext>
-            </a:extLst>
-          </p:cNvPr>
-          <p:cNvSpPr>
-            <a:spLocks noGrp="1"/>
-          </p:cNvSpPr>
-          <p:nvPr/>
-        </p:nvSpPr>
-        <p:spPr>
-          <a:xfrm>
-            <a:off x="533400" y="4352925"/>
-            <a:ext cx="8077200" cy="361950"/>
-          </a:xfrm>
-          <a:prstGeom prst="roundRect">
-            <a:avLst>
-              <a:gd name="adj" fmla="val 15789"/>
-            </a:avLst>
-          </a:prstGeom>
-          <a:solidFill>
-            <a:srgbClr val="F0F6FC"/>
-          </a:solidFill>
-          <a:ln w="9525">
-            <a:solidFill>
-              <a:srgbClr val="215FB4"/>
-            </a:solidFill>
-            <a:prstDash val="solid"/>
-          </a:ln>
-        </p:spPr>
-      </p:sp>
-      <p:sp>
-        <p:nvSpPr>
-          <p:cNvPr id="48" name="s17-governance-text">
-            <a:extLst>
-              <a:ext uri="{FF2B5EF4-FFF2-40B4-BE49-F238E27FC236}">
-                <a16:creationId xmlns:a16="http://schemas.microsoft.com/office/drawing/2014/main" id="{A23BCE35-7ACD-412E-BB89-42CC044C6D3A}"/>
-              </a:ext>
-            </a:extLst>
-          </p:cNvPr>
-          <p:cNvSpPr>
-            <a:spLocks noGrp="1"/>
-          </p:cNvSpPr>
-          <p:nvPr/>
-        </p:nvSpPr>
-        <p:spPr>
-          <a:xfrm>
-            <a:off x="723900" y="4381500"/>
-            <a:ext cx="7696200" cy="304800"/>
-          </a:xfrm>
-          <a:prstGeom prst="rect">
-            <a:avLst/>
-          </a:prstGeom>
-          <a:noFill/>
-          <a:ln w="0">
-            <a:noFill/>
-            <a:prstDash val="solid"/>
-          </a:ln>
-        </p:spPr>
-        <p:txBody>
-          <a:bodyPr wrap="square" lIns="0" tIns="0" rIns="0" bIns="0" anchor="ctr">
-            <a:normAutofit/>
-          </a:bodyPr>
-          <a:lstStyle/>
-          <a:p>
-            <a:pPr algn="ctr">
-              <a:defRPr sz="1200" b="1">
-                <a:solidFill>
-                  <a:srgbClr val="215FB4"/>
-                </a:solidFill>
-                <a:latin typeface="Noto Sans CJK JP"/>
-                <a:ea typeface="Noto Sans CJK JP"/>
-                <a:cs typeface="Noto Sans CJK JP"/>
-              </a:defRPr>
-            </a:pPr>
-            <a:r>
-              <a:rPr lang="ja-JP" altLang="en-US" sz="1200" b="1" dirty="0">
-                <a:solidFill>
-                  <a:srgbClr val="215FB4"/>
-                </a:solidFill>
-                <a:latin typeface="Noto Sans CJK JP"/>
-                <a:ea typeface="Noto Sans CJK JP"/>
-                <a:cs typeface="Noto Sans CJK JP"/>
-              </a:rPr>
-              <a:t>特に、</a:t>
-            </a:r>
-            <a:r>
-              <a:rPr lang="en-US" altLang="ja-JP" sz="1200" b="1" dirty="0">
-                <a:solidFill>
-                  <a:srgbClr val="215FB4"/>
-                </a:solidFill>
-                <a:latin typeface="Noto Sans CJK JP"/>
-                <a:ea typeface="Noto Sans CJK JP"/>
-                <a:cs typeface="Noto Sans CJK JP"/>
-              </a:rPr>
-              <a:t>MVS</a:t>
-            </a:r>
-            <a:r>
-              <a:rPr lang="ja-JP" altLang="en-US" sz="1200" b="1" dirty="0">
-                <a:solidFill>
-                  <a:srgbClr val="215FB4"/>
-                </a:solidFill>
-                <a:latin typeface="Noto Sans CJK JP"/>
-                <a:ea typeface="Noto Sans CJK JP"/>
-                <a:cs typeface="Noto Sans CJK JP"/>
-              </a:rPr>
-              <a:t>については退職金分布を改善する結果が出たので、探索的ではなく理論的な最適化が求められる</a:t>
-            </a:r>
-            <a:endParaRPr sz="1200" b="1" dirty="0">
-              <a:solidFill>
-                <a:srgbClr val="215FB4"/>
-              </a:solidFill>
-              <a:latin typeface="Noto Sans CJK JP"/>
-              <a:ea typeface="Noto Sans CJK JP"/>
-              <a:cs typeface="Noto Sans CJK JP"/>
-            </a:endParaRPr>
-          </a:p>
-        </p:txBody>
-      </p:sp>
-      <p:sp>
-        <p:nvSpPr>
-          <p:cNvPr id="6" name="s17-left-3">
-            <a:extLst>
-              <a:ext uri="{FF2B5EF4-FFF2-40B4-BE49-F238E27FC236}">
-                <a16:creationId xmlns:a16="http://schemas.microsoft.com/office/drawing/2014/main" id="{7496F812-FDBB-EE52-7D59-528560448124}"/>
-              </a:ext>
-            </a:extLst>
-          </p:cNvPr>
-          <p:cNvSpPr>
-            <a:spLocks noGrp="1"/>
-          </p:cNvSpPr>
-          <p:nvPr/>
-        </p:nvSpPr>
-        <p:spPr>
-          <a:xfrm>
-            <a:off x="952499" y="3414713"/>
-            <a:ext cx="3286125" cy="266700"/>
-          </a:xfrm>
-          <a:prstGeom prst="rect">
-            <a:avLst/>
-          </a:prstGeom>
-          <a:noFill/>
-          <a:ln w="0">
-            <a:noFill/>
-            <a:prstDash val="solid"/>
-          </a:ln>
-        </p:spPr>
-        <p:txBody>
-          <a:bodyPr wrap="square" lIns="0" tIns="0" rIns="0" bIns="0" anchor="ctr">
-            <a:normAutofit/>
-          </a:bodyPr>
-          <a:lstStyle/>
-          <a:p>
-            <a:pPr>
-              <a:defRPr sz="1035" b="0">
-                <a:solidFill>
-                  <a:srgbClr val="111827"/>
-                </a:solidFill>
-                <a:latin typeface="Noto Sans CJK JP"/>
-                <a:ea typeface="Noto Sans CJK JP"/>
-                <a:cs typeface="Noto Sans CJK JP"/>
-              </a:defRPr>
-            </a:pPr>
-            <a:r>
-              <a:rPr lang="en-US" altLang="ja-JP" sz="1035" b="1" dirty="0">
-                <a:solidFill>
-                  <a:srgbClr val="111827"/>
-                </a:solidFill>
-                <a:latin typeface="Noto Sans CJK JP"/>
-                <a:ea typeface="Noto Sans CJK JP"/>
-                <a:cs typeface="Noto Sans CJK JP"/>
-              </a:rPr>
-              <a:t>MVS</a:t>
-            </a:r>
-            <a:r>
-              <a:rPr lang="ja-JP" altLang="en-US" sz="1035" b="1" dirty="0">
-                <a:solidFill>
-                  <a:srgbClr val="111827"/>
-                </a:solidFill>
-                <a:latin typeface="Noto Sans CJK JP"/>
-                <a:ea typeface="Noto Sans CJK JP"/>
-                <a:cs typeface="Noto Sans CJK JP"/>
-              </a:rPr>
-              <a:t>基準を導入した場合の探索的結果</a:t>
-            </a:r>
-            <a:endParaRPr sz="1035" b="1" dirty="0">
-              <a:solidFill>
-                <a:srgbClr val="111827"/>
-              </a:solidFill>
-              <a:latin typeface="Noto Sans CJK JP"/>
-              <a:ea typeface="Noto Sans CJK JP"/>
-              <a:cs typeface="Noto Sans CJK JP"/>
-            </a:endParaRPr>
-          </a:p>
-        </p:txBody>
-      </p:sp>
-    </p:spTree>
-    <p:extLst>
-      <p:ext uri="{BB962C8B-B14F-4D97-AF65-F5344CB8AC3E}">
-        <p14:creationId xmlns:p14="http://schemas.microsoft.com/office/powerpoint/2010/main" val="875397706"/>
-      </p:ext>
-    </p:extLst>
-  </p:cSld>
-  <p:clrMapOvr>
-    <a:masterClrMapping/>
-  </p:clrMapOvr>
-</p:sld>
-</file>
-
-<file path=ppt/slides/slide25.xml><?xml version="1.0" encoding="utf-8"?>
-<p:sld xmlns:a="http://schemas.openxmlformats.org/drawingml/2006/main" xmlns:r="http://schemas.openxmlformats.org/officeDocument/2006/relationships" xmlns:p="http://schemas.openxmlformats.org/presentationml/2006/main">
-  <p:cSld>
-    <p:spTree>
-      <p:nvGrpSpPr>
-        <p:cNvPr id="1" name=""/>
-        <p:cNvGrpSpPr/>
-        <p:nvPr/>
-      </p:nvGrpSpPr>
-      <p:grpSpPr>
-        <a:xfrm>
-          <a:off x="0" y="0"/>
-          <a:ext cx="0" cy="0"/>
-          <a:chOff x="0" y="0"/>
-          <a:chExt cx="0" cy="0"/>
-        </a:xfrm>
-      </p:grpSpPr>
-      <p:sp>
-        <p:nvSpPr>
-          <p:cNvPr id="2" name="Title 1">
-            <a:extLst>
-              <a:ext uri="{FF2B5EF4-FFF2-40B4-BE49-F238E27FC236}">
-                <a16:creationId xmlns:a16="http://schemas.microsoft.com/office/drawing/2014/main" id="{D2EB5FB2-DE08-01C4-4B0F-3D45E31A046E}"/>
-              </a:ext>
-            </a:extLst>
-          </p:cNvPr>
-          <p:cNvSpPr>
-            <a:spLocks noGrp="1"/>
-          </p:cNvSpPr>
-          <p:nvPr>
-            <p:ph type="title"/>
-          </p:nvPr>
-        </p:nvSpPr>
-        <p:spPr>
-          <a:xfrm>
-            <a:off x="457200" y="990600"/>
-            <a:ext cx="8229600" cy="609600"/>
-          </a:xfrm>
-        </p:spPr>
-        <p:txBody>
-          <a:bodyPr wrap="none" lIns="0" tIns="0" rIns="0" bIns="0" anchor="ctr">
-            <a:normAutofit/>
-          </a:bodyPr>
-          <a:lstStyle/>
-          <a:p>
-            <a:pPr algn="l">
-              <a:buNone/>
               <a:defRPr sz="2063" b="1">
                 <a:solidFill>
                   <a:srgbClr val="111827"/>
@@ -37091,29 +34764,7 @@
                 <a:ea typeface="Noto Sans CJK JP"/>
                 <a:cs typeface="Noto Sans CJK JP"/>
               </a:rPr>
-              <a:t>固有の条件下で、</a:t>
-            </a:r>
-            <a:r>
-              <a:rPr lang="en-US" altLang="ja-JP" sz="1575" b="1" dirty="0">
-                <a:solidFill>
-                  <a:srgbClr val="111827"/>
-                </a:solidFill>
-                <a:latin typeface="Noto Sans CJK JP"/>
-                <a:ea typeface="Noto Sans CJK JP"/>
-                <a:cs typeface="Noto Sans CJK JP"/>
-              </a:rPr>
-              <a:t>4</a:t>
-            </a:r>
-            <a:r>
-              <a:rPr lang="ja-JP" altLang="en-US" sz="1575" b="1" dirty="0">
-                <a:solidFill>
-                  <a:srgbClr val="111827"/>
-                </a:solidFill>
-                <a:latin typeface="Noto Sans CJK JP"/>
-                <a:ea typeface="Noto Sans CJK JP"/>
-                <a:cs typeface="Noto Sans CJK JP"/>
-              </a:rPr>
-              <a:t>解概念を統一的定式化</a:t>
+              <a:t>固有の制約下で、内生的に最適グライドパスを生成</a:t>
             </a:r>
             <a:endParaRPr sz="1575" b="1" dirty="0">
               <a:solidFill>
@@ -37353,7 +35004,7 @@
         </p:spPr>
         <p:txBody>
           <a:bodyPr wrap="square" lIns="0" tIns="0" rIns="0" bIns="0" anchor="ctr">
-            <a:normAutofit fontScale="92500"/>
+            <a:normAutofit/>
           </a:bodyPr>
           <a:lstStyle/>
           <a:p>
@@ -37369,7 +35020,7 @@
             </a:pPr>
             <a:r>
               <a:rPr lang="ja-JP" altLang="en-US" sz="1575" b="1" dirty="0"/>
-              <a:t>“将来時点の変化に対し、どの戦略が最適か”を測る新指標</a:t>
+              <a:t>新指標</a:t>
             </a:r>
             <a:r>
               <a:rPr lang="ja-JP" altLang="ja-JP" sz="1575" b="1" dirty="0"/>
@@ -37377,7 +35028,15 @@
             </a:r>
             <a:r>
               <a:rPr lang="ja-JP" altLang="en-US" sz="1575" b="1" dirty="0"/>
-              <a:t>を作成</a:t>
+              <a:t>と</a:t>
+            </a:r>
+            <a:r>
+              <a:rPr lang="en-US" altLang="ja-JP" sz="1575" b="1" dirty="0"/>
+              <a:t>MGH</a:t>
+            </a:r>
+            <a:r>
+              <a:rPr lang="ja-JP" altLang="en-US" sz="1575" b="1" dirty="0"/>
+              <a:t>エンジンにより、複雑な数値計算の近似を実現</a:t>
             </a:r>
             <a:endParaRPr sz="1575" b="1" dirty="0">
               <a:solidFill>
@@ -37424,7 +35083,7 @@
           </a:bodyPr>
           <a:lstStyle/>
           <a:p>
-            <a:pPr algn="l">
+            <a:pPr>
               <a:defRPr sz="990" b="0">
                 <a:solidFill>
                   <a:srgbClr val="64748B"/>
@@ -37435,6 +35094,17 @@
               </a:defRPr>
             </a:pPr>
             <a:r>
+              <a:rPr lang="en-US" altLang="ja-JP" sz="990" b="0" dirty="0">
+                <a:solidFill>
+                  <a:srgbClr val="64748B"/>
+                </a:solidFill>
+                <a:latin typeface="Noto Sans CJK JP"/>
+                <a:ea typeface="Noto Sans CJK JP"/>
+                <a:cs typeface="Noto Sans CJK JP"/>
+              </a:rPr>
+              <a:t>10000</a:t>
+            </a:r>
+            <a:r>
               <a:rPr lang="ja-JP" altLang="en-US" sz="990" b="0" dirty="0">
                 <a:solidFill>
                   <a:srgbClr val="64748B"/>
@@ -37443,7 +35113,7 @@
                 <a:ea typeface="Noto Sans CJK JP"/>
                 <a:cs typeface="Noto Sans CJK JP"/>
               </a:rPr>
-              <a:t>共通の</a:t>
+              <a:t>パス</a:t>
             </a:r>
             <a:r>
               <a:rPr lang="en-US" altLang="ja-JP" sz="990" b="0" dirty="0">
@@ -37454,7 +35124,7 @@
                 <a:ea typeface="Noto Sans CJK JP"/>
                 <a:cs typeface="Noto Sans CJK JP"/>
               </a:rPr>
-              <a:t>Markov–Gauss–Hermite</a:t>
+              <a:t>×480</a:t>
             </a:r>
             <a:r>
               <a:rPr lang="ja-JP" altLang="en-US" sz="990" b="0" dirty="0">
@@ -37465,7 +35135,51 @@
                 <a:ea typeface="Noto Sans CJK JP"/>
                 <a:cs typeface="Noto Sans CJK JP"/>
               </a:rPr>
-              <a:t>エンジンで一貫して評価し、全分散公式によるリスクの切り分けを可視化</a:t>
+              <a:t>期のような実務負荷の高い計算から、</a:t>
+            </a:r>
+            <a:r>
+              <a:rPr lang="en-US" altLang="ja-JP" sz="990" b="0" dirty="0">
+                <a:solidFill>
+                  <a:srgbClr val="64748B"/>
+                </a:solidFill>
+                <a:latin typeface="Noto Sans CJK JP"/>
+                <a:ea typeface="Noto Sans CJK JP"/>
+                <a:cs typeface="Noto Sans CJK JP"/>
+              </a:rPr>
+              <a:t>5</a:t>
+            </a:r>
+            <a:r>
+              <a:rPr lang="ja-JP" altLang="en-US" sz="990" b="0" dirty="0">
+                <a:solidFill>
+                  <a:srgbClr val="64748B"/>
+                </a:solidFill>
+                <a:latin typeface="Noto Sans CJK JP"/>
+                <a:ea typeface="Noto Sans CJK JP"/>
+                <a:cs typeface="Noto Sans CJK JP"/>
+              </a:rPr>
+              <a:t>ノード</a:t>
+            </a:r>
+            <a:r>
+              <a:rPr lang="en-US" altLang="ja-JP" sz="990" dirty="0">
+                <a:solidFill>
+                  <a:srgbClr val="64748B"/>
+                </a:solidFill>
+                <a:latin typeface="Noto Sans CJK JP"/>
+                <a:ea typeface="Noto Sans CJK JP"/>
+                <a:cs typeface="Noto Sans CJK JP"/>
+              </a:rPr>
+              <a:t>× 480</a:t>
+            </a:r>
+            <a:r>
+              <a:rPr lang="ja-JP" altLang="en-US" sz="990" dirty="0">
+                <a:solidFill>
+                  <a:srgbClr val="64748B"/>
+                </a:solidFill>
+                <a:latin typeface="Noto Sans CJK JP"/>
+                <a:ea typeface="Noto Sans CJK JP"/>
+                <a:cs typeface="Noto Sans CJK JP"/>
+              </a:rPr>
+              <a:t>期程度の簡便な計算で本番計算を実現</a:t>
             </a:r>
             <a:endParaRPr sz="990" b="0" dirty="0">
               <a:solidFill>
@@ -37654,7 +35368,7 @@
               </a:defRPr>
             </a:pPr>
             <a:r>
-              <a:rPr sz="1575" b="1" dirty="0">
+              <a:rPr lang="ja-JP" altLang="en-US" sz="1575" b="1" dirty="0">
                 <a:solidFill>
                   <a:srgbClr val="111827"/>
                 </a:solidFill>
@@ -37662,73 +35376,7 @@
                 <a:ea typeface="Noto Sans CJK JP"/>
                 <a:cs typeface="Noto Sans CJK JP"/>
               </a:rPr>
-              <a:t>4解</a:t>
-            </a:r>
-            <a:r>
-              <a:rPr lang="ja-JP" altLang="en-US" sz="1575" b="1" dirty="0">
-                <a:solidFill>
-                  <a:srgbClr val="111827"/>
-                </a:solidFill>
-                <a:latin typeface="Noto Sans CJK JP"/>
-                <a:ea typeface="Noto Sans CJK JP"/>
-                <a:cs typeface="Noto Sans CJK JP"/>
-              </a:rPr>
-              <a:t>概念</a:t>
-            </a:r>
-            <a:r>
-              <a:rPr sz="1575" b="1" dirty="0">
-                <a:solidFill>
-                  <a:srgbClr val="111827"/>
-                </a:solidFill>
-                <a:latin typeface="Noto Sans CJK JP"/>
-                <a:ea typeface="Noto Sans CJK JP"/>
-                <a:cs typeface="Noto Sans CJK JP"/>
-              </a:rPr>
-              <a:t>を3層</a:t>
-            </a:r>
-            <a:r>
-              <a:rPr lang="ja-JP" altLang="en-US" sz="1575" b="1" dirty="0">
-                <a:solidFill>
-                  <a:srgbClr val="111827"/>
-                </a:solidFill>
-                <a:latin typeface="Noto Sans CJK JP"/>
-                <a:ea typeface="Noto Sans CJK JP"/>
-                <a:cs typeface="Noto Sans CJK JP"/>
-              </a:rPr>
-              <a:t>の</a:t>
-            </a:r>
-            <a:r>
-              <a:rPr sz="1575" b="1" dirty="0" err="1">
-                <a:solidFill>
-                  <a:srgbClr val="111827"/>
-                </a:solidFill>
-                <a:latin typeface="Noto Sans CJK JP"/>
-                <a:ea typeface="Noto Sans CJK JP"/>
-                <a:cs typeface="Noto Sans CJK JP"/>
-              </a:rPr>
-              <a:t>運用</a:t>
-            </a:r>
-            <a:r>
-              <a:rPr lang="ja-JP" altLang="en-US" sz="1575" b="1" dirty="0">
-                <a:solidFill>
-                  <a:srgbClr val="111827"/>
-                </a:solidFill>
-                <a:latin typeface="Noto Sans CJK JP"/>
-                <a:ea typeface="Noto Sans CJK JP"/>
-                <a:cs typeface="Noto Sans CJK JP"/>
-              </a:rPr>
-              <a:t>実務</a:t>
-            </a:r>
-            <a:r>
-              <a:rPr sz="1575" b="1" dirty="0" err="1">
-                <a:solidFill>
-                  <a:srgbClr val="111827"/>
-                </a:solidFill>
-                <a:latin typeface="Noto Sans CJK JP"/>
-                <a:ea typeface="Noto Sans CJK JP"/>
-                <a:cs typeface="Noto Sans CJK JP"/>
-              </a:rPr>
-              <a:t>へ翻訳</a:t>
+              <a:t>歪度選好を通じて、より受容可能なパーソナライズ運用を可能に</a:t>
             </a:r>
             <a:endParaRPr sz="1575" b="1" dirty="0">
               <a:solidFill>
@@ -37786,7 +35434,7 @@
               </a:defRPr>
             </a:pPr>
             <a:r>
-              <a:rPr sz="990" b="0" dirty="0" err="1">
+              <a:rPr lang="en-US" altLang="ja-JP" sz="990" b="0" dirty="0">
                 <a:solidFill>
                   <a:srgbClr val="64748B"/>
                 </a:solidFill>
@@ -37794,10 +35442,10 @@
                 <a:ea typeface="Noto Sans CJK JP"/>
                 <a:cs typeface="Noto Sans CJK JP"/>
               </a:rPr>
-              <a:t>cTCMV</a:t>
-            </a:r>
-            <a:r>
-              <a:rPr sz="990" b="0" dirty="0">
+              <a:t>U</a:t>
+            </a:r>
+            <a:r>
+              <a:rPr lang="ja-JP" altLang="en-US" sz="990" b="0" dirty="0">
                 <a:solidFill>
                   <a:srgbClr val="64748B"/>
                 </a:solidFill>
@@ -37805,106 +35453,7 @@
                 <a:ea typeface="Noto Sans CJK JP"/>
                 <a:cs typeface="Noto Sans CJK JP"/>
               </a:rPr>
-              <a:t>＝</a:t>
-            </a:r>
-            <a:r>
-              <a:rPr lang="ja-JP" altLang="en-US" sz="990" dirty="0">
-                <a:solidFill>
-                  <a:srgbClr val="64748B"/>
-                </a:solidFill>
-                <a:latin typeface="Noto Sans CJK JP"/>
-                <a:ea typeface="Noto Sans CJK JP"/>
-                <a:cs typeface="Noto Sans CJK JP"/>
-              </a:rPr>
-              <a:t>指定運用方法</a:t>
-            </a:r>
-            <a:r>
-              <a:rPr sz="990" b="0" dirty="0">
-                <a:solidFill>
-                  <a:srgbClr val="64748B"/>
-                </a:solidFill>
-                <a:latin typeface="Noto Sans CJK JP"/>
-                <a:ea typeface="Noto Sans CJK JP"/>
-                <a:cs typeface="Noto Sans CJK JP"/>
-              </a:rPr>
-              <a:t>、DOMV＝</a:t>
-            </a:r>
-            <a:r>
-              <a:rPr lang="ja-JP" altLang="en-US" sz="990" b="0" dirty="0">
-                <a:solidFill>
-                  <a:srgbClr val="64748B"/>
-                </a:solidFill>
-                <a:latin typeface="Noto Sans CJK JP"/>
-                <a:ea typeface="Noto Sans CJK JP"/>
-                <a:cs typeface="Noto Sans CJK JP"/>
-              </a:rPr>
-              <a:t>定期的</a:t>
-            </a:r>
-            <a:r>
-              <a:rPr sz="990" b="0" dirty="0" err="1">
-                <a:solidFill>
-                  <a:srgbClr val="64748B"/>
-                </a:solidFill>
-                <a:latin typeface="Noto Sans CJK JP"/>
-                <a:ea typeface="Noto Sans CJK JP"/>
-                <a:cs typeface="Noto Sans CJK JP"/>
-              </a:rPr>
-              <a:t>見直し、dTCMV＝個別</a:t>
-            </a:r>
-            <a:r>
-              <a:rPr lang="ja-JP" altLang="en-US" sz="990" b="0" dirty="0">
-                <a:solidFill>
-                  <a:srgbClr val="64748B"/>
-                </a:solidFill>
-                <a:latin typeface="Noto Sans CJK JP"/>
-                <a:ea typeface="Noto Sans CJK JP"/>
-                <a:cs typeface="Noto Sans CJK JP"/>
-              </a:rPr>
-              <a:t>パーソナライズ</a:t>
-            </a:r>
-            <a:r>
-              <a:rPr sz="990" b="0" dirty="0">
-                <a:solidFill>
-                  <a:srgbClr val="64748B"/>
-                </a:solidFill>
-                <a:latin typeface="Noto Sans CJK JP"/>
-                <a:ea typeface="Noto Sans CJK JP"/>
-                <a:cs typeface="Noto Sans CJK JP"/>
-              </a:rPr>
-              <a:t>化、</a:t>
-            </a:r>
-            <a:r>
-              <a:rPr lang="en-US" altLang="ja-JP" sz="990" b="0" dirty="0">
-                <a:solidFill>
-                  <a:srgbClr val="64748B"/>
-                </a:solidFill>
-                <a:latin typeface="Noto Sans CJK JP"/>
-                <a:ea typeface="Noto Sans CJK JP"/>
-                <a:cs typeface="Noto Sans CJK JP"/>
-              </a:rPr>
-              <a:t>※</a:t>
-            </a:r>
-            <a:r>
-              <a:rPr sz="990" b="0" dirty="0">
-                <a:solidFill>
-                  <a:srgbClr val="64748B"/>
-                </a:solidFill>
-                <a:latin typeface="Noto Sans CJK JP"/>
-                <a:ea typeface="Noto Sans CJK JP"/>
-                <a:cs typeface="Noto Sans CJK JP"/>
-              </a:rPr>
-              <a:t>PCMV＝</a:t>
-            </a:r>
-            <a:r>
-              <a:rPr lang="ja-JP" altLang="en-US" sz="990" b="0" dirty="0">
-                <a:solidFill>
-                  <a:srgbClr val="64748B"/>
-                </a:solidFill>
-                <a:latin typeface="Noto Sans CJK JP"/>
-                <a:ea typeface="Noto Sans CJK JP"/>
-                <a:cs typeface="Noto Sans CJK JP"/>
-              </a:rPr>
-              <a:t>ベンチマーク</a:t>
+              <a:t>字から減少型のグライドパスへ形状変更し受容可能にしたうえで、上振れ追究も実現</a:t>
             </a:r>
             <a:endParaRPr sz="990" b="0" dirty="0">
               <a:solidFill>
@@ -41579,7 +39128,7 @@
                           <m:sSub>
                             <m:sSubPr>
                               <m:ctrlPr>
-                                <a:rPr lang="en-US" altLang="ja-JP" sz="1600" b="0" i="1">
+                                <a:rPr lang="en-US" altLang="ja-JP" sz="1600" b="0" i="1" smtClean="0">
                                   <a:solidFill>
                                     <a:schemeClr val="tx1"/>
                                   </a:solidFill>
@@ -41591,7 +39140,7 @@
                             </m:sSubPr>
                             <m:e>
                               <m:r>
-                                <a:rPr lang="en-US" altLang="ja-JP" sz="1600" b="0" i="1">
+                                <a:rPr lang="en-US" altLang="ja-JP" sz="1600" b="0" i="1" smtClean="0">
                                   <a:solidFill>
                                     <a:schemeClr val="tx1"/>
                                   </a:solidFill>
@@ -41599,7 +39148,7 @@
                                   <a:ea typeface="Cambria Math" panose="02040503050406030204" pitchFamily="18" charset="0"/>
                                   <a:cs typeface="Noto Sans CJK JP"/>
                                 </a:rPr>
-                                <m:t>𝑅</m:t>
+                                <m:t>𝑟</m:t>
                               </m:r>
                             </m:e>
                             <m:sub>
@@ -43046,7 +40595,7 @@
               <p:nvPr>
                 <p:extLst>
                   <p:ext uri="{D42A27DB-BD31-4B8C-83A1-F6EECF244321}">
-                    <p14:modId xmlns:p14="http://schemas.microsoft.com/office/powerpoint/2010/main" val="3954783695"/>
+                    <p14:modId xmlns:p14="http://schemas.microsoft.com/office/powerpoint/2010/main" val="2039764534"/>
                   </p:ext>
                 </p:extLst>
               </p:nvPr>
@@ -43659,7 +41208,10 @@
                                 <m:sSub>
                                   <m:sSubPr>
                                     <m:ctrlPr>
-                                      <a:rPr lang="en-US" altLang="ja-JP" sz="1200" i="1">
+                                      <a:rPr lang="en-US" altLang="ja-JP" sz="1200" b="0" i="1" smtClean="0">
+                                        <a:solidFill>
+                                          <a:schemeClr val="tx1"/>
+                                        </a:solidFill>
                                         <a:latin typeface="Cambria Math" panose="02040503050406030204" pitchFamily="18" charset="0"/>
                                         <a:ea typeface="Cambria Math" panose="02040503050406030204" pitchFamily="18" charset="0"/>
                                         <a:cs typeface="Noto Sans CJK JP"/>
@@ -43668,17 +41220,23 @@
                                   </m:sSubPr>
                                   <m:e>
                                     <m:r>
-                                      <a:rPr lang="en-US" altLang="ja-JP" sz="1200" i="1">
+                                      <a:rPr lang="en-US" altLang="ja-JP" sz="1200" b="0" i="1" smtClean="0">
+                                        <a:solidFill>
+                                          <a:schemeClr val="tx1"/>
+                                        </a:solidFill>
                                         <a:latin typeface="Cambria Math" panose="02040503050406030204" pitchFamily="18" charset="0"/>
                                         <a:ea typeface="Cambria Math" panose="02040503050406030204" pitchFamily="18" charset="0"/>
                                         <a:cs typeface="Noto Sans CJK JP"/>
                                       </a:rPr>
-                                      <m:t>𝑅</m:t>
+                                      <m:t>𝑟</m:t>
                                     </m:r>
                                   </m:e>
                                   <m:sub>
                                     <m:r>
                                       <a:rPr lang="en-US" altLang="ja-JP" sz="1200" b="0" i="1" smtClean="0">
+                                        <a:solidFill>
+                                          <a:schemeClr val="tx1"/>
+                                        </a:solidFill>
                                         <a:latin typeface="Cambria Math" panose="02040503050406030204" pitchFamily="18" charset="0"/>
                                         <a:ea typeface="Cambria Math" panose="02040503050406030204" pitchFamily="18" charset="0"/>
                                         <a:cs typeface="Noto Sans CJK JP"/>
@@ -44219,7 +41777,10 @@
                                 <m:sSub>
                                   <m:sSubPr>
                                     <m:ctrlPr>
-                                      <a:rPr lang="en-US" altLang="ja-JP" sz="1200" i="1">
+                                      <a:rPr lang="en-US" altLang="ja-JP" sz="1200" b="0" i="1" smtClean="0">
+                                        <a:solidFill>
+                                          <a:schemeClr val="tx1"/>
+                                        </a:solidFill>
                                         <a:latin typeface="Cambria Math" panose="02040503050406030204" pitchFamily="18" charset="0"/>
                                         <a:ea typeface="Cambria Math" panose="02040503050406030204" pitchFamily="18" charset="0"/>
                                         <a:cs typeface="Noto Sans CJK JP"/>
@@ -44228,17 +41789,23 @@
                                   </m:sSubPr>
                                   <m:e>
                                     <m:r>
-                                      <a:rPr lang="en-US" altLang="ja-JP" sz="1200" i="1">
+                                      <a:rPr lang="en-US" altLang="ja-JP" sz="1200" b="0" i="1" smtClean="0">
+                                        <a:solidFill>
+                                          <a:schemeClr val="tx1"/>
+                                        </a:solidFill>
                                         <a:latin typeface="Cambria Math" panose="02040503050406030204" pitchFamily="18" charset="0"/>
                                         <a:ea typeface="Cambria Math" panose="02040503050406030204" pitchFamily="18" charset="0"/>
                                         <a:cs typeface="Noto Sans CJK JP"/>
                                       </a:rPr>
-                                      <m:t>𝑅</m:t>
+                                      <m:t>𝑟</m:t>
                                     </m:r>
                                   </m:e>
                                   <m:sub>
                                     <m:r>
-                                      <a:rPr lang="en-US" altLang="ja-JP" sz="1200" i="1">
+                                      <a:rPr lang="en-US" altLang="ja-JP" sz="1200" b="0" i="1">
+                                        <a:solidFill>
+                                          <a:schemeClr val="tx1"/>
+                                        </a:solidFill>
                                         <a:latin typeface="Cambria Math" panose="02040503050406030204" pitchFamily="18" charset="0"/>
                                         <a:ea typeface="Cambria Math" panose="02040503050406030204" pitchFamily="18" charset="0"/>
                                         <a:cs typeface="Noto Sans CJK JP"/>
@@ -44755,7 +42322,10 @@
                                 <m:sSub>
                                   <m:sSubPr>
                                     <m:ctrlPr>
-                                      <a:rPr lang="en-US" altLang="ja-JP" sz="1100" i="1">
+                                      <a:rPr lang="en-US" altLang="ja-JP" sz="1100" b="0" i="1" smtClean="0">
+                                        <a:solidFill>
+                                          <a:schemeClr val="tx1"/>
+                                        </a:solidFill>
                                         <a:latin typeface="Cambria Math" panose="02040503050406030204" pitchFamily="18" charset="0"/>
                                         <a:ea typeface="Cambria Math" panose="02040503050406030204" pitchFamily="18" charset="0"/>
                                         <a:cs typeface="Noto Sans CJK JP"/>
@@ -44764,17 +42334,23 @@
                                   </m:sSubPr>
                                   <m:e>
                                     <m:r>
-                                      <a:rPr lang="en-US" altLang="ja-JP" sz="1100" i="1">
+                                      <a:rPr lang="en-US" altLang="ja-JP" sz="1100" b="0" i="1" smtClean="0">
+                                        <a:solidFill>
+                                          <a:schemeClr val="tx1"/>
+                                        </a:solidFill>
                                         <a:latin typeface="Cambria Math" panose="02040503050406030204" pitchFamily="18" charset="0"/>
                                         <a:ea typeface="Cambria Math" panose="02040503050406030204" pitchFamily="18" charset="0"/>
                                         <a:cs typeface="Noto Sans CJK JP"/>
                                       </a:rPr>
-                                      <m:t>𝑅</m:t>
+                                      <m:t>𝑟</m:t>
                                     </m:r>
                                   </m:e>
                                   <m:sub>
                                     <m:r>
-                                      <a:rPr lang="en-US" altLang="ja-JP" sz="1100" i="1">
+                                      <a:rPr lang="en-US" altLang="ja-JP" sz="1100" b="0" i="1">
+                                        <a:solidFill>
+                                          <a:schemeClr val="tx1"/>
+                                        </a:solidFill>
                                         <a:latin typeface="Cambria Math" panose="02040503050406030204" pitchFamily="18" charset="0"/>
                                         <a:ea typeface="Cambria Math" panose="02040503050406030204" pitchFamily="18" charset="0"/>
                                         <a:cs typeface="Noto Sans CJK JP"/>
@@ -45397,7 +42973,10 @@
                                 <m:sSub>
                                   <m:sSubPr>
                                     <m:ctrlPr>
-                                      <a:rPr lang="en-US" altLang="ja-JP" sz="1100" i="1">
+                                      <a:rPr lang="en-US" altLang="ja-JP" sz="1100" b="0" i="1" smtClean="0">
+                                        <a:solidFill>
+                                          <a:schemeClr val="tx1"/>
+                                        </a:solidFill>
                                         <a:latin typeface="Cambria Math" panose="02040503050406030204" pitchFamily="18" charset="0"/>
                                         <a:ea typeface="Cambria Math" panose="02040503050406030204" pitchFamily="18" charset="0"/>
                                         <a:cs typeface="Noto Sans CJK JP"/>
@@ -45406,17 +42985,23 @@
                                   </m:sSubPr>
                                   <m:e>
                                     <m:r>
-                                      <a:rPr lang="en-US" altLang="ja-JP" sz="1100" i="1">
+                                      <a:rPr lang="en-US" altLang="ja-JP" sz="1100" b="0" i="1" smtClean="0">
+                                        <a:solidFill>
+                                          <a:schemeClr val="tx1"/>
+                                        </a:solidFill>
                                         <a:latin typeface="Cambria Math" panose="02040503050406030204" pitchFamily="18" charset="0"/>
                                         <a:ea typeface="Cambria Math" panose="02040503050406030204" pitchFamily="18" charset="0"/>
                                         <a:cs typeface="Noto Sans CJK JP"/>
                                       </a:rPr>
-                                      <m:t>𝑅</m:t>
+                                      <m:t>𝑟</m:t>
                                     </m:r>
                                   </m:e>
                                   <m:sub>
                                     <m:r>
-                                      <a:rPr lang="en-US" altLang="ja-JP" sz="1100" i="1">
+                                      <a:rPr lang="en-US" altLang="ja-JP" sz="1100" b="0" i="1">
+                                        <a:solidFill>
+                                          <a:schemeClr val="tx1"/>
+                                        </a:solidFill>
                                         <a:latin typeface="Cambria Math" panose="02040503050406030204" pitchFamily="18" charset="0"/>
                                         <a:ea typeface="Cambria Math" panose="02040503050406030204" pitchFamily="18" charset="0"/>
                                         <a:cs typeface="Noto Sans CJK JP"/>
@@ -45676,7 +43261,7 @@
               <p:nvPr>
                 <p:extLst>
                   <p:ext uri="{D42A27DB-BD31-4B8C-83A1-F6EECF244321}">
-                    <p14:modId xmlns:p14="http://schemas.microsoft.com/office/powerpoint/2010/main" val="3954783695"/>
+                    <p14:modId xmlns:p14="http://schemas.microsoft.com/office/powerpoint/2010/main" val="2039764534"/>
                   </p:ext>
                 </p:extLst>
               </p:nvPr>
